--- a/docs/KT1_ML4_prezentacija_v2.pptx
+++ b/docs/KT1_ML4_prezentacija_v2.pptx
@@ -155,7 +155,7 @@
       </p:grpSpPr>
       <p:sp>
         <p:nvSpPr>
-          <p:cNvPr id="796891354" name="Header Placeholder 1"/>
+          <p:cNvPr id="444408746" name="Header Placeholder 1"/>
           <p:cNvSpPr>
             <a:spLocks noGrp="1"/>
           </p:cNvSpPr>
@@ -189,7 +189,7 @@
       </p:sp>
       <p:sp>
         <p:nvSpPr>
-          <p:cNvPr id="1085989716" name="Date Placeholder 2"/>
+          <p:cNvPr id="766782271" name="Date Placeholder 2"/>
           <p:cNvSpPr>
             <a:spLocks noGrp="1"/>
           </p:cNvSpPr>
@@ -223,7 +223,7 @@
       </p:sp>
       <p:sp>
         <p:nvSpPr>
-          <p:cNvPr id="954866400" name="Date Placeholder 2"/>
+          <p:cNvPr id="1691320454" name="Date Placeholder 2"/>
           <p:cNvSpPr>
             <a:spLocks noGrp="1"/>
           </p:cNvSpPr>
@@ -257,7 +257,7 @@
       </p:sp>
       <p:sp>
         <p:nvSpPr>
-          <p:cNvPr id="193115981" name="Notes Placeholder 4"/>
+          <p:cNvPr id="496520506" name="Notes Placeholder 4"/>
           <p:cNvSpPr>
             <a:spLocks noGrp="1"/>
           </p:cNvSpPr>
@@ -287,7 +287,7 @@
       </p:sp>
       <p:sp>
         <p:nvSpPr>
-          <p:cNvPr id="1964098967" name="Footer Placeholder 5"/>
+          <p:cNvPr id="63767208" name="Footer Placeholder 5"/>
           <p:cNvSpPr>
             <a:spLocks noGrp="1"/>
           </p:cNvSpPr>
@@ -321,7 +321,7 @@
       </p:sp>
       <p:sp>
         <p:nvSpPr>
-          <p:cNvPr id="1944029007" name="Slide Number Placeholder 6"/>
+          <p:cNvPr id="1895595303" name="Slide Number Placeholder 6"/>
           <p:cNvSpPr>
             <a:spLocks noGrp="1"/>
           </p:cNvSpPr>
@@ -470,7 +470,7 @@
       </p:grpSpPr>
       <p:sp>
         <p:nvSpPr>
-          <p:cNvPr id="320512260" name="Slide Image Placeholder 1"/>
+          <p:cNvPr id="291411078" name="Slide Image Placeholder 1"/>
           <p:cNvSpPr>
             <a:spLocks noChangeAspect="1" noGrp="1" noRot="1"/>
           </p:cNvSpPr>
@@ -482,7 +482,7 @@
       </p:sp>
       <p:sp>
         <p:nvSpPr>
-          <p:cNvPr id="1945108265" name="Notes Placeholder 2"/>
+          <p:cNvPr id="1546270054" name="Notes Placeholder 2"/>
           <p:cNvSpPr>
             <a:spLocks noGrp="1"/>
           </p:cNvSpPr>
@@ -504,7 +504,7 @@
       </p:sp>
       <p:sp>
         <p:nvSpPr>
-          <p:cNvPr id="1545658753" name="Slide Number Placeholder 3"/>
+          <p:cNvPr id="455564303" name="Slide Number Placeholder 3"/>
           <p:cNvSpPr>
             <a:spLocks noGrp="1"/>
           </p:cNvSpPr>
@@ -555,7 +555,7 @@
       </p:grpSpPr>
       <p:sp>
         <p:nvSpPr>
-          <p:cNvPr id="1858556918" name="Slide Image Placeholder 1"/>
+          <p:cNvPr id="1347497639" name="Slide Image Placeholder 1"/>
           <p:cNvSpPr>
             <a:spLocks noChangeAspect="1" noGrp="1" noRot="1"/>
           </p:cNvSpPr>
@@ -567,7 +567,7 @@
       </p:sp>
       <p:sp>
         <p:nvSpPr>
-          <p:cNvPr id="273952313" name="Notes Placeholder 2"/>
+          <p:cNvPr id="1795746884" name="Notes Placeholder 2"/>
           <p:cNvSpPr>
             <a:spLocks noGrp="1"/>
           </p:cNvSpPr>
@@ -589,7 +589,7 @@
       </p:sp>
       <p:sp>
         <p:nvSpPr>
-          <p:cNvPr id="1097495060" name="Slide Number Placeholder 3"/>
+          <p:cNvPr id="966007792" name="Slide Number Placeholder 3"/>
           <p:cNvSpPr>
             <a:spLocks noGrp="1"/>
           </p:cNvSpPr>
@@ -640,7 +640,7 @@
       </p:grpSpPr>
       <p:sp>
         <p:nvSpPr>
-          <p:cNvPr id="59290000" name="Slide Image Placeholder 1"/>
+          <p:cNvPr id="275602749" name="Slide Image Placeholder 1"/>
           <p:cNvSpPr>
             <a:spLocks noChangeAspect="1" noGrp="1" noRot="1"/>
           </p:cNvSpPr>
@@ -652,7 +652,7 @@
       </p:sp>
       <p:sp>
         <p:nvSpPr>
-          <p:cNvPr id="2072851554" name="Notes Placeholder 2"/>
+          <p:cNvPr id="1620450699" name="Notes Placeholder 2"/>
           <p:cNvSpPr>
             <a:spLocks noGrp="1"/>
           </p:cNvSpPr>
@@ -674,7 +674,7 @@
       </p:sp>
       <p:sp>
         <p:nvSpPr>
-          <p:cNvPr id="1298084629" name="Slide Number Placeholder 3"/>
+          <p:cNvPr id="764581676" name="Slide Number Placeholder 3"/>
           <p:cNvSpPr>
             <a:spLocks noGrp="1"/>
           </p:cNvSpPr>
@@ -725,7 +725,7 @@
       </p:grpSpPr>
       <p:sp>
         <p:nvSpPr>
-          <p:cNvPr id="902519536" name="Slide Image Placeholder 1"/>
+          <p:cNvPr id="2030239322" name="Slide Image Placeholder 1"/>
           <p:cNvSpPr>
             <a:spLocks noChangeAspect="1" noGrp="1" noRot="1"/>
           </p:cNvSpPr>
@@ -737,7 +737,7 @@
       </p:sp>
       <p:sp>
         <p:nvSpPr>
-          <p:cNvPr id="1342846528" name="Notes Placeholder 2"/>
+          <p:cNvPr id="446464510" name="Notes Placeholder 2"/>
           <p:cNvSpPr>
             <a:spLocks noGrp="1"/>
           </p:cNvSpPr>
@@ -759,7 +759,7 @@
       </p:sp>
       <p:sp>
         <p:nvSpPr>
-          <p:cNvPr id="1663606096" name="Slide Number Placeholder 3"/>
+          <p:cNvPr id="268549912" name="Slide Number Placeholder 3"/>
           <p:cNvSpPr>
             <a:spLocks noGrp="1"/>
           </p:cNvSpPr>
@@ -810,7 +810,7 @@
       </p:grpSpPr>
       <p:sp>
         <p:nvSpPr>
-          <p:cNvPr id="1165815026" name="Slide Image Placeholder 1"/>
+          <p:cNvPr id="599840837" name="Slide Image Placeholder 1"/>
           <p:cNvSpPr>
             <a:spLocks noChangeAspect="1" noGrp="1" noRot="1"/>
           </p:cNvSpPr>
@@ -822,7 +822,7 @@
       </p:sp>
       <p:sp>
         <p:nvSpPr>
-          <p:cNvPr id="2015528152" name="Notes Placeholder 2"/>
+          <p:cNvPr id="1007689714" name="Notes Placeholder 2"/>
           <p:cNvSpPr>
             <a:spLocks noGrp="1"/>
           </p:cNvSpPr>
@@ -844,7 +844,7 @@
       </p:sp>
       <p:sp>
         <p:nvSpPr>
-          <p:cNvPr id="1932263805" name="Slide Number Placeholder 3"/>
+          <p:cNvPr id="1001437128" name="Slide Number Placeholder 3"/>
           <p:cNvSpPr>
             <a:spLocks noGrp="1"/>
           </p:cNvSpPr>
@@ -895,7 +895,7 @@
       </p:grpSpPr>
       <p:sp>
         <p:nvSpPr>
-          <p:cNvPr id="758734128" name="Slide Image Placeholder 1"/>
+          <p:cNvPr id="1373367124" name="Slide Image Placeholder 1"/>
           <p:cNvSpPr>
             <a:spLocks noChangeAspect="1" noGrp="1" noRot="1"/>
           </p:cNvSpPr>
@@ -907,7 +907,7 @@
       </p:sp>
       <p:sp>
         <p:nvSpPr>
-          <p:cNvPr id="1350312089" name="Notes Placeholder 2"/>
+          <p:cNvPr id="194117574" name="Notes Placeholder 2"/>
           <p:cNvSpPr>
             <a:spLocks noGrp="1"/>
           </p:cNvSpPr>
@@ -929,7 +929,7 @@
       </p:sp>
       <p:sp>
         <p:nvSpPr>
-          <p:cNvPr id="781709228" name="Slide Number Placeholder 3"/>
+          <p:cNvPr id="606699054" name="Slide Number Placeholder 3"/>
           <p:cNvSpPr>
             <a:spLocks noGrp="1"/>
           </p:cNvSpPr>
@@ -980,7 +980,7 @@
       </p:grpSpPr>
       <p:sp>
         <p:nvSpPr>
-          <p:cNvPr id="39037664" name="Slide Image Placeholder 1"/>
+          <p:cNvPr id="225385604" name="Slide Image Placeholder 1"/>
           <p:cNvSpPr>
             <a:spLocks noChangeAspect="1" noGrp="1" noRot="1"/>
           </p:cNvSpPr>
@@ -992,7 +992,7 @@
       </p:sp>
       <p:sp>
         <p:nvSpPr>
-          <p:cNvPr id="1482329176" name="Notes Placeholder 2"/>
+          <p:cNvPr id="100535917" name="Notes Placeholder 2"/>
           <p:cNvSpPr>
             <a:spLocks noGrp="1"/>
           </p:cNvSpPr>
@@ -1014,7 +1014,7 @@
       </p:sp>
       <p:sp>
         <p:nvSpPr>
-          <p:cNvPr id="1898065084" name="Slide Number Placeholder 3"/>
+          <p:cNvPr id="645509113" name="Slide Number Placeholder 3"/>
           <p:cNvSpPr>
             <a:spLocks noGrp="1"/>
           </p:cNvSpPr>
@@ -1065,7 +1065,7 @@
       </p:grpSpPr>
       <p:sp>
         <p:nvSpPr>
-          <p:cNvPr id="2" name="Slide Image Placeholder 1"/>
+          <p:cNvPr id="2079745600" name="Slide Image Placeholder 1"/>
           <p:cNvSpPr>
             <a:spLocks noChangeAspect="1" noGrp="1" noRot="1"/>
           </p:cNvSpPr>
@@ -1077,7 +1077,7 @@
       </p:sp>
       <p:sp>
         <p:nvSpPr>
-          <p:cNvPr id="3" name="Notes Placeholder 2"/>
+          <p:cNvPr id="1289312428" name="Notes Placeholder 2"/>
           <p:cNvSpPr>
             <a:spLocks noGrp="1"/>
           </p:cNvSpPr>
@@ -1099,7 +1099,7 @@
       </p:sp>
       <p:sp>
         <p:nvSpPr>
-          <p:cNvPr id="4" name="Slide Number Placeholder 3"/>
+          <p:cNvPr id="1125895983" name="Slide Number Placeholder 3"/>
           <p:cNvSpPr>
             <a:spLocks noGrp="1"/>
           </p:cNvSpPr>
@@ -1150,7 +1150,7 @@
       </p:grpSpPr>
       <p:sp>
         <p:nvSpPr>
-          <p:cNvPr id="2" name="Slide Image Placeholder 1"/>
+          <p:cNvPr id="1806267176" name="Slide Image Placeholder 1"/>
           <p:cNvSpPr>
             <a:spLocks noChangeAspect="1" noGrp="1" noRot="1"/>
           </p:cNvSpPr>
@@ -1162,7 +1162,7 @@
       </p:sp>
       <p:sp>
         <p:nvSpPr>
-          <p:cNvPr id="3" name="Notes Placeholder 2"/>
+          <p:cNvPr id="1142106073" name="Notes Placeholder 2"/>
           <p:cNvSpPr>
             <a:spLocks noGrp="1"/>
           </p:cNvSpPr>
@@ -1184,7 +1184,7 @@
       </p:sp>
       <p:sp>
         <p:nvSpPr>
-          <p:cNvPr id="4" name="Slide Number Placeholder 3"/>
+          <p:cNvPr id="1775010525" name="Slide Number Placeholder 3"/>
           <p:cNvSpPr>
             <a:spLocks noGrp="1"/>
           </p:cNvSpPr>
@@ -1235,7 +1235,7 @@
       </p:grpSpPr>
       <p:sp>
         <p:nvSpPr>
-          <p:cNvPr id="2" name="Slide Image Placeholder 1"/>
+          <p:cNvPr id="805393463" name="Slide Image Placeholder 1"/>
           <p:cNvSpPr>
             <a:spLocks noChangeAspect="1" noGrp="1" noRot="1"/>
           </p:cNvSpPr>
@@ -1247,7 +1247,7 @@
       </p:sp>
       <p:sp>
         <p:nvSpPr>
-          <p:cNvPr id="3" name="Notes Placeholder 2"/>
+          <p:cNvPr id="1175442553" name="Notes Placeholder 2"/>
           <p:cNvSpPr>
             <a:spLocks noGrp="1"/>
           </p:cNvSpPr>
@@ -1269,7 +1269,7 @@
       </p:sp>
       <p:sp>
         <p:nvSpPr>
-          <p:cNvPr id="4" name="Slide Number Placeholder 3"/>
+          <p:cNvPr id="1713483957" name="Slide Number Placeholder 3"/>
           <p:cNvSpPr>
             <a:spLocks noGrp="1"/>
           </p:cNvSpPr>
@@ -1320,7 +1320,7 @@
       </p:grpSpPr>
       <p:sp>
         <p:nvSpPr>
-          <p:cNvPr id="2" name="Slide Image Placeholder 1"/>
+          <p:cNvPr id="1277677955" name="Slide Image Placeholder 1"/>
           <p:cNvSpPr>
             <a:spLocks noChangeAspect="1" noGrp="1" noRot="1"/>
           </p:cNvSpPr>
@@ -1332,7 +1332,7 @@
       </p:sp>
       <p:sp>
         <p:nvSpPr>
-          <p:cNvPr id="3" name="Notes Placeholder 2"/>
+          <p:cNvPr id="1252652286" name="Notes Placeholder 2"/>
           <p:cNvSpPr>
             <a:spLocks noGrp="1"/>
           </p:cNvSpPr>
@@ -1354,7 +1354,7 @@
       </p:sp>
       <p:sp>
         <p:nvSpPr>
-          <p:cNvPr id="4" name="Slide Number Placeholder 3"/>
+          <p:cNvPr id="251297224" name="Slide Number Placeholder 3"/>
           <p:cNvSpPr>
             <a:spLocks noGrp="1"/>
           </p:cNvSpPr>
@@ -1405,7 +1405,7 @@
       </p:grpSpPr>
       <p:sp>
         <p:nvSpPr>
-          <p:cNvPr id="1753929960" name="Slide Image Placeholder 1"/>
+          <p:cNvPr id="1004716824" name="Slide Image Placeholder 1"/>
           <p:cNvSpPr>
             <a:spLocks noChangeAspect="1" noGrp="1" noRot="1"/>
           </p:cNvSpPr>
@@ -1417,7 +1417,7 @@
       </p:sp>
       <p:sp>
         <p:nvSpPr>
-          <p:cNvPr id="1823611499" name="Notes Placeholder 2"/>
+          <p:cNvPr id="446618746" name="Notes Placeholder 2"/>
           <p:cNvSpPr>
             <a:spLocks noGrp="1"/>
           </p:cNvSpPr>
@@ -1439,7 +1439,7 @@
       </p:sp>
       <p:sp>
         <p:nvSpPr>
-          <p:cNvPr id="1794658792" name="Slide Number Placeholder 3"/>
+          <p:cNvPr id="457870068" name="Slide Number Placeholder 3"/>
           <p:cNvSpPr>
             <a:spLocks noGrp="1"/>
           </p:cNvSpPr>
@@ -1490,7 +1490,7 @@
       </p:grpSpPr>
       <p:sp>
         <p:nvSpPr>
-          <p:cNvPr id="992740871" name="Slide Image Placeholder 1"/>
+          <p:cNvPr id="531987083" name="Slide Image Placeholder 1"/>
           <p:cNvSpPr>
             <a:spLocks noChangeAspect="1" noGrp="1" noRot="1"/>
           </p:cNvSpPr>
@@ -1502,7 +1502,7 @@
       </p:sp>
       <p:sp>
         <p:nvSpPr>
-          <p:cNvPr id="1673114769" name="Notes Placeholder 2"/>
+          <p:cNvPr id="2063969463" name="Notes Placeholder 2"/>
           <p:cNvSpPr>
             <a:spLocks noGrp="1"/>
           </p:cNvSpPr>
@@ -1524,7 +1524,7 @@
       </p:sp>
       <p:sp>
         <p:nvSpPr>
-          <p:cNvPr id="2127902058" name="Slide Number Placeholder 3"/>
+          <p:cNvPr id="1459968507" name="Slide Number Placeholder 3"/>
           <p:cNvSpPr>
             <a:spLocks noGrp="1"/>
           </p:cNvSpPr>
@@ -1575,7 +1575,7 @@
       </p:grpSpPr>
       <p:sp>
         <p:nvSpPr>
-          <p:cNvPr id="1057791949" name="Slide Image Placeholder 1"/>
+          <p:cNvPr id="870225385" name="Slide Image Placeholder 1"/>
           <p:cNvSpPr>
             <a:spLocks noChangeAspect="1" noGrp="1" noRot="1"/>
           </p:cNvSpPr>
@@ -1587,7 +1587,7 @@
       </p:sp>
       <p:sp>
         <p:nvSpPr>
-          <p:cNvPr id="1136026923" name="Notes Placeholder 2"/>
+          <p:cNvPr id="847781354" name="Notes Placeholder 2"/>
           <p:cNvSpPr>
             <a:spLocks noGrp="1"/>
           </p:cNvSpPr>
@@ -1609,7 +1609,7 @@
       </p:sp>
       <p:sp>
         <p:nvSpPr>
-          <p:cNvPr id="1237051966" name="Slide Number Placeholder 3"/>
+          <p:cNvPr id="345870467" name="Slide Number Placeholder 3"/>
           <p:cNvSpPr>
             <a:spLocks noGrp="1"/>
           </p:cNvSpPr>
@@ -1660,7 +1660,7 @@
       </p:grpSpPr>
       <p:sp>
         <p:nvSpPr>
-          <p:cNvPr id="1988989639" name="Slide Image Placeholder 1"/>
+          <p:cNvPr id="1569700857" name="Slide Image Placeholder 1"/>
           <p:cNvSpPr>
             <a:spLocks noChangeAspect="1" noGrp="1" noRot="1"/>
           </p:cNvSpPr>
@@ -1672,7 +1672,7 @@
       </p:sp>
       <p:sp>
         <p:nvSpPr>
-          <p:cNvPr id="940623871" name="Notes Placeholder 2"/>
+          <p:cNvPr id="984464" name="Notes Placeholder 2"/>
           <p:cNvSpPr>
             <a:spLocks noGrp="1"/>
           </p:cNvSpPr>
@@ -1694,7 +1694,7 @@
       </p:sp>
       <p:sp>
         <p:nvSpPr>
-          <p:cNvPr id="715914926" name="Slide Number Placeholder 3"/>
+          <p:cNvPr id="1335501116" name="Slide Number Placeholder 3"/>
           <p:cNvSpPr>
             <a:spLocks noGrp="1"/>
           </p:cNvSpPr>
@@ -1745,7 +1745,7 @@
       </p:grpSpPr>
       <p:sp>
         <p:nvSpPr>
-          <p:cNvPr id="505202775" name="Slide Image Placeholder 1"/>
+          <p:cNvPr id="214026379" name="Slide Image Placeholder 1"/>
           <p:cNvSpPr>
             <a:spLocks noChangeAspect="1" noGrp="1" noRot="1"/>
           </p:cNvSpPr>
@@ -1757,7 +1757,7 @@
       </p:sp>
       <p:sp>
         <p:nvSpPr>
-          <p:cNvPr id="161520555" name="Notes Placeholder 2"/>
+          <p:cNvPr id="39631501" name="Notes Placeholder 2"/>
           <p:cNvSpPr>
             <a:spLocks noGrp="1"/>
           </p:cNvSpPr>
@@ -1779,7 +1779,7 @@
       </p:sp>
       <p:sp>
         <p:nvSpPr>
-          <p:cNvPr id="2019418613" name="Slide Number Placeholder 3"/>
+          <p:cNvPr id="1230758278" name="Slide Number Placeholder 3"/>
           <p:cNvSpPr>
             <a:spLocks noGrp="1"/>
           </p:cNvSpPr>
@@ -1830,7 +1830,7 @@
       </p:grpSpPr>
       <p:sp>
         <p:nvSpPr>
-          <p:cNvPr id="1515532346" name="Slide Image Placeholder 1"/>
+          <p:cNvPr id="1431302338" name="Slide Image Placeholder 1"/>
           <p:cNvSpPr>
             <a:spLocks noChangeAspect="1" noGrp="1" noRot="1"/>
           </p:cNvSpPr>
@@ -1842,7 +1842,7 @@
       </p:sp>
       <p:sp>
         <p:nvSpPr>
-          <p:cNvPr id="1062977845" name="Notes Placeholder 2"/>
+          <p:cNvPr id="1070547768" name="Notes Placeholder 2"/>
           <p:cNvSpPr>
             <a:spLocks noGrp="1"/>
           </p:cNvSpPr>
@@ -1864,7 +1864,7 @@
       </p:sp>
       <p:sp>
         <p:nvSpPr>
-          <p:cNvPr id="12561970" name="Slide Number Placeholder 3"/>
+          <p:cNvPr id="211400834" name="Slide Number Placeholder 3"/>
           <p:cNvSpPr>
             <a:spLocks noGrp="1"/>
           </p:cNvSpPr>
@@ -1915,7 +1915,7 @@
       </p:grpSpPr>
       <p:sp>
         <p:nvSpPr>
-          <p:cNvPr id="1314069753" name="Slide Image Placeholder 1"/>
+          <p:cNvPr id="1095935463" name="Slide Image Placeholder 1"/>
           <p:cNvSpPr>
             <a:spLocks noChangeAspect="1" noGrp="1" noRot="1"/>
           </p:cNvSpPr>
@@ -1927,7 +1927,7 @@
       </p:sp>
       <p:sp>
         <p:nvSpPr>
-          <p:cNvPr id="296376576" name="Notes Placeholder 2"/>
+          <p:cNvPr id="1061706495" name="Notes Placeholder 2"/>
           <p:cNvSpPr>
             <a:spLocks noGrp="1"/>
           </p:cNvSpPr>
@@ -1949,7 +1949,7 @@
       </p:sp>
       <p:sp>
         <p:nvSpPr>
-          <p:cNvPr id="1120140570" name="Slide Number Placeholder 3"/>
+          <p:cNvPr id="873939251" name="Slide Number Placeholder 3"/>
           <p:cNvSpPr>
             <a:spLocks noGrp="1"/>
           </p:cNvSpPr>
@@ -2000,7 +2000,7 @@
       </p:grpSpPr>
       <p:sp>
         <p:nvSpPr>
-          <p:cNvPr id="1974440298" name="Slide Image Placeholder 1"/>
+          <p:cNvPr id="1254618680" name="Slide Image Placeholder 1"/>
           <p:cNvSpPr>
             <a:spLocks noChangeAspect="1" noGrp="1" noRot="1"/>
           </p:cNvSpPr>
@@ -2012,7 +2012,7 @@
       </p:sp>
       <p:sp>
         <p:nvSpPr>
-          <p:cNvPr id="1509284579" name="Notes Placeholder 2"/>
+          <p:cNvPr id="257370218" name="Notes Placeholder 2"/>
           <p:cNvSpPr>
             <a:spLocks noGrp="1"/>
           </p:cNvSpPr>
@@ -2034,7 +2034,7 @@
       </p:sp>
       <p:sp>
         <p:nvSpPr>
-          <p:cNvPr id="289084515" name="Slide Number Placeholder 3"/>
+          <p:cNvPr id="270856055" name="Slide Number Placeholder 3"/>
           <p:cNvSpPr>
             <a:spLocks noGrp="1"/>
           </p:cNvSpPr>
@@ -2085,7 +2085,7 @@
       </p:grpSpPr>
       <p:sp>
         <p:nvSpPr>
-          <p:cNvPr id="593264042" name="Slide Image Placeholder 1"/>
+          <p:cNvPr id="1966548851" name="Slide Image Placeholder 1"/>
           <p:cNvSpPr>
             <a:spLocks noChangeAspect="1" noGrp="1" noRot="1"/>
           </p:cNvSpPr>
@@ -2097,7 +2097,7 @@
       </p:sp>
       <p:sp>
         <p:nvSpPr>
-          <p:cNvPr id="8649833" name="Notes Placeholder 2"/>
+          <p:cNvPr id="1066029743" name="Notes Placeholder 2"/>
           <p:cNvSpPr>
             <a:spLocks noGrp="1"/>
           </p:cNvSpPr>
@@ -2119,7 +2119,7 @@
       </p:sp>
       <p:sp>
         <p:nvSpPr>
-          <p:cNvPr id="176924655" name="Slide Number Placeholder 3"/>
+          <p:cNvPr id="106635885" name="Slide Number Placeholder 3"/>
           <p:cNvSpPr>
             <a:spLocks noGrp="1"/>
           </p:cNvSpPr>
@@ -2170,7 +2170,7 @@
       </p:grpSpPr>
       <p:sp>
         <p:nvSpPr>
-          <p:cNvPr id="1464402291" name="Slide Image Placeholder 1"/>
+          <p:cNvPr id="1503897820" name="Slide Image Placeholder 1"/>
           <p:cNvSpPr>
             <a:spLocks noChangeAspect="1" noGrp="1" noRot="1"/>
           </p:cNvSpPr>
@@ -2182,7 +2182,7 @@
       </p:sp>
       <p:sp>
         <p:nvSpPr>
-          <p:cNvPr id="1846509367" name="Notes Placeholder 2"/>
+          <p:cNvPr id="56410383" name="Notes Placeholder 2"/>
           <p:cNvSpPr>
             <a:spLocks noGrp="1"/>
           </p:cNvSpPr>
@@ -2204,7 +2204,7 @@
       </p:sp>
       <p:sp>
         <p:nvSpPr>
-          <p:cNvPr id="433423329" name="Slide Number Placeholder 3"/>
+          <p:cNvPr id="689530522" name="Slide Number Placeholder 3"/>
           <p:cNvSpPr>
             <a:spLocks noGrp="1"/>
           </p:cNvSpPr>
@@ -2255,7 +2255,7 @@
       </p:grpSpPr>
       <p:sp>
         <p:nvSpPr>
-          <p:cNvPr id="996298740" name="Rectangle 9"/>
+          <p:cNvPr id="870647846" name="Rectangle 9"/>
           <p:cNvSpPr/>
           <p:nvPr/>
         </p:nvSpPr>
@@ -2305,7 +2305,7 @@
       </p:sp>
       <p:sp>
         <p:nvSpPr>
-          <p:cNvPr id="1231421175" name="Oval 5"/>
+          <p:cNvPr id="2017453016" name="Oval 5"/>
           <p:cNvSpPr/>
           <p:nvPr/>
         </p:nvSpPr>
@@ -10916,7 +10916,7 @@
       </p:sp>
       <p:sp>
         <p:nvSpPr>
-          <p:cNvPr id="1038593744" name="Title 1"/>
+          <p:cNvPr id="1830419958" name="Title 1"/>
           <p:cNvSpPr>
             <a:spLocks noGrp="1"/>
           </p:cNvSpPr>
@@ -10953,7 +10953,7 @@
       </p:sp>
       <p:sp>
         <p:nvSpPr>
-          <p:cNvPr id="94009210" name="Subtitle 2"/>
+          <p:cNvPr id="1981953323" name="Subtitle 2"/>
           <p:cNvSpPr>
             <a:spLocks noGrp="1"/>
           </p:cNvSpPr>
@@ -11036,7 +11036,7 @@
       </p:sp>
       <p:sp>
         <p:nvSpPr>
-          <p:cNvPr id="1456885683" name="Date Placeholder 3"/>
+          <p:cNvPr id="172370442" name="Date Placeholder 3"/>
           <p:cNvSpPr>
             <a:spLocks noGrp="1"/>
           </p:cNvSpPr>
@@ -11066,7 +11066,7 @@
       </p:sp>
       <p:sp>
         <p:nvSpPr>
-          <p:cNvPr id="1696371796" name="Footer Placeholder 4"/>
+          <p:cNvPr id="988732407" name="Footer Placeholder 4"/>
           <p:cNvSpPr>
             <a:spLocks noGrp="1"/>
           </p:cNvSpPr>
@@ -11088,7 +11088,7 @@
       </p:sp>
       <p:sp>
         <p:nvSpPr>
-          <p:cNvPr id="1900168399" name="Slide Number Placeholder 5"/>
+          <p:cNvPr id="1947325589" name="Slide Number Placeholder 5"/>
           <p:cNvSpPr>
             <a:spLocks noGrp="1"/>
           </p:cNvSpPr>
@@ -11114,7 +11114,7 @@
       </p:sp>
       <p:cxnSp>
         <p:nvCxnSpPr>
-          <p:cNvPr id="1528148819" name="Straight Connector 7"/>
+          <p:cNvPr id="734713152" name="Straight Connector 7"/>
           <p:cNvCxnSpPr/>
           <p:nvPr/>
         </p:nvCxnSpPr>
@@ -11176,7 +11176,7 @@
       </p:grpSpPr>
       <p:sp>
         <p:nvSpPr>
-          <p:cNvPr id="571654686" name="Title 1"/>
+          <p:cNvPr id="247570693" name="Title 1"/>
           <p:cNvSpPr>
             <a:spLocks noGrp="1"/>
           </p:cNvSpPr>
@@ -11202,7 +11202,7 @@
       </p:sp>
       <p:sp>
         <p:nvSpPr>
-          <p:cNvPr id="1726000184" name="Vertical Text Placeholder 2"/>
+          <p:cNvPr id="308509276" name="Vertical Text Placeholder 2"/>
           <p:cNvSpPr>
             <a:spLocks noGrp="1"/>
           </p:cNvSpPr>
@@ -11268,7 +11268,7 @@
       </p:sp>
       <p:sp>
         <p:nvSpPr>
-          <p:cNvPr id="1635665928" name="Date Placeholder 3"/>
+          <p:cNvPr id="909037160" name="Date Placeholder 3"/>
           <p:cNvSpPr>
             <a:spLocks noGrp="1"/>
           </p:cNvSpPr>
@@ -11294,7 +11294,7 @@
       </p:sp>
       <p:sp>
         <p:nvSpPr>
-          <p:cNvPr id="518988127" name="Footer Placeholder 4"/>
+          <p:cNvPr id="199916779" name="Footer Placeholder 4"/>
           <p:cNvSpPr>
             <a:spLocks noGrp="1"/>
           </p:cNvSpPr>
@@ -11316,7 +11316,7 @@
       </p:sp>
       <p:sp>
         <p:nvSpPr>
-          <p:cNvPr id="924213626" name="Slide Number Placeholder 5"/>
+          <p:cNvPr id="1860391108" name="Slide Number Placeholder 5"/>
           <p:cNvSpPr>
             <a:spLocks noGrp="1"/>
           </p:cNvSpPr>
@@ -11367,7 +11367,7 @@
       </p:grpSpPr>
       <p:sp>
         <p:nvSpPr>
-          <p:cNvPr id="1772074329" name="Vertical Title 1"/>
+          <p:cNvPr id="872803460" name="Vertical Title 1"/>
           <p:cNvSpPr>
             <a:spLocks noGrp="1"/>
           </p:cNvSpPr>
@@ -11398,7 +11398,7 @@
       </p:sp>
       <p:sp>
         <p:nvSpPr>
-          <p:cNvPr id="1218363091" name="Vertical Text Placeholder 2"/>
+          <p:cNvPr id="1091130152" name="Vertical Text Placeholder 2"/>
           <p:cNvSpPr>
             <a:spLocks noGrp="1"/>
           </p:cNvSpPr>
@@ -11469,7 +11469,7 @@
       </p:sp>
       <p:sp>
         <p:nvSpPr>
-          <p:cNvPr id="287237291" name="Date Placeholder 3"/>
+          <p:cNvPr id="761192286" name="Date Placeholder 3"/>
           <p:cNvSpPr>
             <a:spLocks noGrp="1"/>
           </p:cNvSpPr>
@@ -11495,7 +11495,7 @@
       </p:sp>
       <p:sp>
         <p:nvSpPr>
-          <p:cNvPr id="228301774" name="Footer Placeholder 4"/>
+          <p:cNvPr id="1471754136" name="Footer Placeholder 4"/>
           <p:cNvSpPr>
             <a:spLocks noGrp="1"/>
           </p:cNvSpPr>
@@ -11517,7 +11517,7 @@
       </p:sp>
       <p:sp>
         <p:nvSpPr>
-          <p:cNvPr id="827240446" name="Slide Number Placeholder 5"/>
+          <p:cNvPr id="479748714" name="Slide Number Placeholder 5"/>
           <p:cNvSpPr>
             <a:spLocks noGrp="1"/>
           </p:cNvSpPr>
@@ -11543,7 +11543,7 @@
       </p:sp>
       <p:cxnSp>
         <p:nvCxnSpPr>
-          <p:cNvPr id="1266343203" name="Straight Connector 6"/>
+          <p:cNvPr id="1589755113" name="Straight Connector 6"/>
           <p:cNvCxnSpPr/>
           <p:nvPr/>
         </p:nvCxnSpPr>
@@ -11603,7 +11603,7 @@
       </p:grpSpPr>
       <p:sp>
         <p:nvSpPr>
-          <p:cNvPr id="1250461829" name="Title 1"/>
+          <p:cNvPr id="642569172" name="Title 1"/>
           <p:cNvSpPr>
             <a:spLocks noGrp="1"/>
           </p:cNvSpPr>
@@ -11634,7 +11634,7 @@
       </p:sp>
       <p:sp>
         <p:nvSpPr>
-          <p:cNvPr id="2041121027" name="Subtitle 2"/>
+          <p:cNvPr id="1210837273" name="Subtitle 2"/>
           <p:cNvSpPr>
             <a:spLocks noGrp="1"/>
           </p:cNvSpPr>
@@ -11756,7 +11756,7 @@
       </p:sp>
       <p:sp>
         <p:nvSpPr>
-          <p:cNvPr id="856230618" name="Date Placeholder 3"/>
+          <p:cNvPr id="1202473533" name="Date Placeholder 3"/>
           <p:cNvSpPr>
             <a:spLocks noGrp="1"/>
           </p:cNvSpPr>
@@ -11782,7 +11782,7 @@
       </p:sp>
       <p:sp>
         <p:nvSpPr>
-          <p:cNvPr id="1029418182" name="Footer Placeholder 4"/>
+          <p:cNvPr id="1003894059" name="Footer Placeholder 4"/>
           <p:cNvSpPr>
             <a:spLocks noGrp="1"/>
           </p:cNvSpPr>
@@ -11804,7 +11804,7 @@
       </p:sp>
       <p:sp>
         <p:nvSpPr>
-          <p:cNvPr id="109555509" name="Slide Number Placeholder 5"/>
+          <p:cNvPr id="306956563" name="Slide Number Placeholder 5"/>
           <p:cNvSpPr>
             <a:spLocks noGrp="1"/>
           </p:cNvSpPr>
@@ -11855,7 +11855,7 @@
       </p:grpSpPr>
       <p:sp>
         <p:nvSpPr>
-          <p:cNvPr id="1563862512" name="Title 1"/>
+          <p:cNvPr id="520527859" name="Title 1"/>
           <p:cNvSpPr>
             <a:spLocks noGrp="1"/>
           </p:cNvSpPr>
@@ -11881,7 +11881,7 @@
       </p:sp>
       <p:sp>
         <p:nvSpPr>
-          <p:cNvPr id="1994167619" name="Content Placeholder 2"/>
+          <p:cNvPr id="805320881" name="Content Placeholder 2"/>
           <p:cNvSpPr>
             <a:spLocks noGrp="1"/>
           </p:cNvSpPr>
@@ -11947,7 +11947,7 @@
       </p:sp>
       <p:sp>
         <p:nvSpPr>
-          <p:cNvPr id="1578139020" name="Date Placeholder 3"/>
+          <p:cNvPr id="868529486" name="Date Placeholder 3"/>
           <p:cNvSpPr>
             <a:spLocks noGrp="1"/>
           </p:cNvSpPr>
@@ -11973,7 +11973,7 @@
       </p:sp>
       <p:sp>
         <p:nvSpPr>
-          <p:cNvPr id="1945365149" name="Footer Placeholder 4"/>
+          <p:cNvPr id="1051785962" name="Footer Placeholder 4"/>
           <p:cNvSpPr>
             <a:spLocks noGrp="1"/>
           </p:cNvSpPr>
@@ -11995,7 +11995,7 @@
       </p:sp>
       <p:sp>
         <p:nvSpPr>
-          <p:cNvPr id="423366877" name="Slide Number Placeholder 5"/>
+          <p:cNvPr id="1814899333" name="Slide Number Placeholder 5"/>
           <p:cNvSpPr>
             <a:spLocks noGrp="1"/>
           </p:cNvSpPr>
@@ -12046,7 +12046,7 @@
       </p:grpSpPr>
       <p:sp>
         <p:nvSpPr>
-          <p:cNvPr id="49329576" name="Title 1"/>
+          <p:cNvPr id="1587961712" name="Title 1"/>
           <p:cNvSpPr>
             <a:spLocks noGrp="1"/>
           </p:cNvSpPr>
@@ -12081,7 +12081,7 @@
       </p:sp>
       <p:sp>
         <p:nvSpPr>
-          <p:cNvPr id="1740135487" name="Text Placeholder 2"/>
+          <p:cNvPr id="361950540" name="Text Placeholder 2"/>
           <p:cNvSpPr>
             <a:spLocks noGrp="1"/>
           </p:cNvSpPr>
@@ -12203,7 +12203,7 @@
       </p:sp>
       <p:sp>
         <p:nvSpPr>
-          <p:cNvPr id="1649499312" name="Date Placeholder 3"/>
+          <p:cNvPr id="206038270" name="Date Placeholder 3"/>
           <p:cNvSpPr>
             <a:spLocks noGrp="1"/>
           </p:cNvSpPr>
@@ -12229,7 +12229,7 @@
       </p:sp>
       <p:sp>
         <p:nvSpPr>
-          <p:cNvPr id="1805285239" name="Footer Placeholder 4"/>
+          <p:cNvPr id="63004932" name="Footer Placeholder 4"/>
           <p:cNvSpPr>
             <a:spLocks noGrp="1"/>
           </p:cNvSpPr>
@@ -12251,7 +12251,7 @@
       </p:sp>
       <p:sp>
         <p:nvSpPr>
-          <p:cNvPr id="361363670" name="Slide Number Placeholder 5"/>
+          <p:cNvPr id="1891178443" name="Slide Number Placeholder 5"/>
           <p:cNvSpPr>
             <a:spLocks noGrp="1"/>
           </p:cNvSpPr>
@@ -12302,7 +12302,7 @@
       </p:grpSpPr>
       <p:sp>
         <p:nvSpPr>
-          <p:cNvPr id="1048196476" name="Title 1"/>
+          <p:cNvPr id="805901676" name="Title 1"/>
           <p:cNvSpPr>
             <a:spLocks noGrp="1"/>
           </p:cNvSpPr>
@@ -12328,7 +12328,7 @@
       </p:sp>
       <p:sp>
         <p:nvSpPr>
-          <p:cNvPr id="769851730" name="Content Placeholder 2"/>
+          <p:cNvPr id="1614045044" name="Content Placeholder 2"/>
           <p:cNvSpPr>
             <a:spLocks noGrp="1"/>
           </p:cNvSpPr>
@@ -12427,7 +12427,7 @@
       </p:sp>
       <p:sp>
         <p:nvSpPr>
-          <p:cNvPr id="641065237" name="Content Placeholder 3"/>
+          <p:cNvPr id="617257788" name="Content Placeholder 3"/>
           <p:cNvSpPr>
             <a:spLocks noGrp="1"/>
           </p:cNvSpPr>
@@ -12526,7 +12526,7 @@
       </p:sp>
       <p:sp>
         <p:nvSpPr>
-          <p:cNvPr id="643592156" name="Date Placeholder 4"/>
+          <p:cNvPr id="1386810230" name="Date Placeholder 4"/>
           <p:cNvSpPr>
             <a:spLocks noGrp="1"/>
           </p:cNvSpPr>
@@ -12552,7 +12552,7 @@
       </p:sp>
       <p:sp>
         <p:nvSpPr>
-          <p:cNvPr id="1782032252" name="Footer Placeholder 5"/>
+          <p:cNvPr id="788626375" name="Footer Placeholder 5"/>
           <p:cNvSpPr>
             <a:spLocks noGrp="1"/>
           </p:cNvSpPr>
@@ -12574,7 +12574,7 @@
       </p:sp>
       <p:sp>
         <p:nvSpPr>
-          <p:cNvPr id="133353634" name="Slide Number Placeholder 6"/>
+          <p:cNvPr id="1564111672" name="Slide Number Placeholder 6"/>
           <p:cNvSpPr>
             <a:spLocks noGrp="1"/>
           </p:cNvSpPr>
@@ -12625,7 +12625,7 @@
       </p:grpSpPr>
       <p:sp>
         <p:nvSpPr>
-          <p:cNvPr id="809158514" name="Title 1"/>
+          <p:cNvPr id="527373772" name="Title 1"/>
           <p:cNvSpPr>
             <a:spLocks noGrp="1"/>
           </p:cNvSpPr>
@@ -12655,7 +12655,7 @@
       </p:sp>
       <p:sp>
         <p:nvSpPr>
-          <p:cNvPr id="1340829728" name="Text Placeholder 2"/>
+          <p:cNvPr id="894363920" name="Text Placeholder 2"/>
           <p:cNvSpPr>
             <a:spLocks noGrp="1"/>
           </p:cNvSpPr>
@@ -12723,7 +12723,7 @@
       </p:sp>
       <p:sp>
         <p:nvSpPr>
-          <p:cNvPr id="301435443" name="Content Placeholder 3"/>
+          <p:cNvPr id="839444821" name="Content Placeholder 3"/>
           <p:cNvSpPr>
             <a:spLocks noGrp="1"/>
           </p:cNvSpPr>
@@ -12822,7 +12822,7 @@
       </p:sp>
       <p:sp>
         <p:nvSpPr>
-          <p:cNvPr id="816861590" name="Text Placeholder 4"/>
+          <p:cNvPr id="1598984157" name="Text Placeholder 4"/>
           <p:cNvSpPr>
             <a:spLocks noGrp="1"/>
           </p:cNvSpPr>
@@ -12890,7 +12890,7 @@
       </p:sp>
       <p:sp>
         <p:nvSpPr>
-          <p:cNvPr id="522932229" name="Content Placeholder 5"/>
+          <p:cNvPr id="1033194543" name="Content Placeholder 5"/>
           <p:cNvSpPr>
             <a:spLocks noGrp="1"/>
           </p:cNvSpPr>
@@ -12989,7 +12989,7 @@
       </p:sp>
       <p:sp>
         <p:nvSpPr>
-          <p:cNvPr id="1444880330" name="Date Placeholder 6"/>
+          <p:cNvPr id="315813756" name="Date Placeholder 6"/>
           <p:cNvSpPr>
             <a:spLocks noGrp="1"/>
           </p:cNvSpPr>
@@ -13015,7 +13015,7 @@
       </p:sp>
       <p:sp>
         <p:nvSpPr>
-          <p:cNvPr id="2128204299" name="Footer Placeholder 7"/>
+          <p:cNvPr id="2093573375" name="Footer Placeholder 7"/>
           <p:cNvSpPr>
             <a:spLocks noGrp="1"/>
           </p:cNvSpPr>
@@ -13037,7 +13037,7 @@
       </p:sp>
       <p:sp>
         <p:nvSpPr>
-          <p:cNvPr id="466689681" name="Slide Number Placeholder 8"/>
+          <p:cNvPr id="603035832" name="Slide Number Placeholder 8"/>
           <p:cNvSpPr>
             <a:spLocks noGrp="1"/>
           </p:cNvSpPr>
@@ -13088,7 +13088,7 @@
       </p:grpSpPr>
       <p:sp>
         <p:nvSpPr>
-          <p:cNvPr id="1874361655" name="Title 1"/>
+          <p:cNvPr id="108326933" name="Title 1"/>
           <p:cNvSpPr>
             <a:spLocks noGrp="1"/>
           </p:cNvSpPr>
@@ -13114,7 +13114,7 @@
       </p:sp>
       <p:sp>
         <p:nvSpPr>
-          <p:cNvPr id="759800331" name="Date Placeholder 2"/>
+          <p:cNvPr id="625952565" name="Date Placeholder 2"/>
           <p:cNvSpPr>
             <a:spLocks noGrp="1"/>
           </p:cNvSpPr>
@@ -13140,7 +13140,7 @@
       </p:sp>
       <p:sp>
         <p:nvSpPr>
-          <p:cNvPr id="1297561182" name="Footer Placeholder 3"/>
+          <p:cNvPr id="80118758" name="Footer Placeholder 3"/>
           <p:cNvSpPr>
             <a:spLocks noGrp="1"/>
           </p:cNvSpPr>
@@ -13162,7 +13162,7 @@
       </p:sp>
       <p:sp>
         <p:nvSpPr>
-          <p:cNvPr id="1651115398" name="Slide Number Placeholder 4"/>
+          <p:cNvPr id="711890324" name="Slide Number Placeholder 4"/>
           <p:cNvSpPr>
             <a:spLocks noGrp="1"/>
           </p:cNvSpPr>
@@ -13213,7 +13213,7 @@
       </p:grpSpPr>
       <p:sp>
         <p:nvSpPr>
-          <p:cNvPr id="1217174095" name="Date Placeholder 1"/>
+          <p:cNvPr id="1411891956" name="Date Placeholder 1"/>
           <p:cNvSpPr>
             <a:spLocks noGrp="1"/>
           </p:cNvSpPr>
@@ -13239,7 +13239,7 @@
       </p:sp>
       <p:sp>
         <p:nvSpPr>
-          <p:cNvPr id="1514953966" name="Footer Placeholder 2"/>
+          <p:cNvPr id="646266078" name="Footer Placeholder 2"/>
           <p:cNvSpPr>
             <a:spLocks noGrp="1"/>
           </p:cNvSpPr>
@@ -13261,7 +13261,7 @@
       </p:sp>
       <p:sp>
         <p:nvSpPr>
-          <p:cNvPr id="212798047" name="Slide Number Placeholder 3"/>
+          <p:cNvPr id="853613506" name="Slide Number Placeholder 3"/>
           <p:cNvSpPr>
             <a:spLocks noGrp="1"/>
           </p:cNvSpPr>
@@ -13312,7 +13312,7 @@
       </p:grpSpPr>
       <p:sp>
         <p:nvSpPr>
-          <p:cNvPr id="1139865336" name="Title 1"/>
+          <p:cNvPr id="1040574850" name="Title 1"/>
           <p:cNvSpPr>
             <a:spLocks noGrp="1"/>
           </p:cNvSpPr>
@@ -13347,7 +13347,7 @@
       </p:sp>
       <p:sp>
         <p:nvSpPr>
-          <p:cNvPr id="1575556515" name="Content Placeholder 2"/>
+          <p:cNvPr id="1605546768" name="Content Placeholder 2"/>
           <p:cNvSpPr>
             <a:spLocks noGrp="1"/>
           </p:cNvSpPr>
@@ -13446,7 +13446,7 @@
       </p:sp>
       <p:sp>
         <p:nvSpPr>
-          <p:cNvPr id="153274470" name="Text Placeholder 3"/>
+          <p:cNvPr id="1973592451" name="Text Placeholder 3"/>
           <p:cNvSpPr>
             <a:spLocks noGrp="1"/>
           </p:cNvSpPr>
@@ -13514,7 +13514,7 @@
       </p:sp>
       <p:sp>
         <p:nvSpPr>
-          <p:cNvPr id="1000594816" name="Date Placeholder 4"/>
+          <p:cNvPr id="485819095" name="Date Placeholder 4"/>
           <p:cNvSpPr>
             <a:spLocks noGrp="1"/>
           </p:cNvSpPr>
@@ -13540,7 +13540,7 @@
       </p:sp>
       <p:sp>
         <p:nvSpPr>
-          <p:cNvPr id="2071742393" name="Footer Placeholder 5"/>
+          <p:cNvPr id="1150798038" name="Footer Placeholder 5"/>
           <p:cNvSpPr>
             <a:spLocks noGrp="1"/>
           </p:cNvSpPr>
@@ -13562,7 +13562,7 @@
       </p:sp>
       <p:sp>
         <p:nvSpPr>
-          <p:cNvPr id="857653147" name="Slide Number Placeholder 6"/>
+          <p:cNvPr id="1549018136" name="Slide Number Placeholder 6"/>
           <p:cNvSpPr>
             <a:spLocks noGrp="1"/>
           </p:cNvSpPr>
@@ -13613,7 +13613,7 @@
       </p:grpSpPr>
       <p:sp>
         <p:nvSpPr>
-          <p:cNvPr id="53230827" name="Title 1"/>
+          <p:cNvPr id="448247288" name="Title 1"/>
           <p:cNvSpPr>
             <a:spLocks noGrp="1"/>
           </p:cNvSpPr>
@@ -13639,7 +13639,7 @@
       </p:sp>
       <p:sp>
         <p:nvSpPr>
-          <p:cNvPr id="435713189" name="Content Placeholder 2"/>
+          <p:cNvPr id="1490119152" name="Content Placeholder 2"/>
           <p:cNvSpPr>
             <a:spLocks noGrp="1"/>
           </p:cNvSpPr>
@@ -13705,7 +13705,7 @@
       </p:sp>
       <p:sp>
         <p:nvSpPr>
-          <p:cNvPr id="2047543810" name="Date Placeholder 3"/>
+          <p:cNvPr id="1751092728" name="Date Placeholder 3"/>
           <p:cNvSpPr>
             <a:spLocks noGrp="1"/>
           </p:cNvSpPr>
@@ -13731,7 +13731,7 @@
       </p:sp>
       <p:sp>
         <p:nvSpPr>
-          <p:cNvPr id="1919709162" name="Footer Placeholder 4"/>
+          <p:cNvPr id="1190714231" name="Footer Placeholder 4"/>
           <p:cNvSpPr>
             <a:spLocks noGrp="1"/>
           </p:cNvSpPr>
@@ -13753,7 +13753,7 @@
       </p:sp>
       <p:sp>
         <p:nvSpPr>
-          <p:cNvPr id="1943556201" name="Slide Number Placeholder 5"/>
+          <p:cNvPr id="462290118" name="Slide Number Placeholder 5"/>
           <p:cNvSpPr>
             <a:spLocks noGrp="1"/>
           </p:cNvSpPr>
@@ -13804,7 +13804,7 @@
       </p:grpSpPr>
       <p:sp>
         <p:nvSpPr>
-          <p:cNvPr id="896974364" name="Title 1"/>
+          <p:cNvPr id="1323966152" name="Title 1"/>
           <p:cNvSpPr>
             <a:spLocks noGrp="1"/>
           </p:cNvSpPr>
@@ -13839,7 +13839,7 @@
       </p:sp>
       <p:sp>
         <p:nvSpPr>
-          <p:cNvPr id="1523521910" name="Picture Placeholder 2"/>
+          <p:cNvPr id="861557114" name="Picture Placeholder 2"/>
           <p:cNvSpPr>
             <a:spLocks noGrp="1"/>
           </p:cNvSpPr>
@@ -13903,7 +13903,7 @@
       </p:sp>
       <p:sp>
         <p:nvSpPr>
-          <p:cNvPr id="579204524" name="Text Placeholder 3"/>
+          <p:cNvPr id="1694462749" name="Text Placeholder 3"/>
           <p:cNvSpPr>
             <a:spLocks noGrp="1"/>
           </p:cNvSpPr>
@@ -13971,7 +13971,7 @@
       </p:sp>
       <p:sp>
         <p:nvSpPr>
-          <p:cNvPr id="477543469" name="Date Placeholder 4"/>
+          <p:cNvPr id="1960379622" name="Date Placeholder 4"/>
           <p:cNvSpPr>
             <a:spLocks noGrp="1"/>
           </p:cNvSpPr>
@@ -13997,7 +13997,7 @@
       </p:sp>
       <p:sp>
         <p:nvSpPr>
-          <p:cNvPr id="855117487" name="Footer Placeholder 5"/>
+          <p:cNvPr id="7931034" name="Footer Placeholder 5"/>
           <p:cNvSpPr>
             <a:spLocks noGrp="1"/>
           </p:cNvSpPr>
@@ -14019,7 +14019,7 @@
       </p:sp>
       <p:sp>
         <p:nvSpPr>
-          <p:cNvPr id="830389326" name="Slide Number Placeholder 6"/>
+          <p:cNvPr id="1871950577" name="Slide Number Placeholder 6"/>
           <p:cNvSpPr>
             <a:spLocks noGrp="1"/>
           </p:cNvSpPr>
@@ -14070,7 +14070,7 @@
       </p:grpSpPr>
       <p:sp>
         <p:nvSpPr>
-          <p:cNvPr id="477207861" name="Title 1"/>
+          <p:cNvPr id="1646987184" name="Title 1"/>
           <p:cNvSpPr>
             <a:spLocks noGrp="1"/>
           </p:cNvSpPr>
@@ -14096,7 +14096,7 @@
       </p:sp>
       <p:sp>
         <p:nvSpPr>
-          <p:cNvPr id="1228736802" name="Vertical Text Placeholder 2"/>
+          <p:cNvPr id="1563704673" name="Vertical Text Placeholder 2"/>
           <p:cNvSpPr>
             <a:spLocks noGrp="1"/>
           </p:cNvSpPr>
@@ -14162,7 +14162,7 @@
       </p:sp>
       <p:sp>
         <p:nvSpPr>
-          <p:cNvPr id="1896686056" name="Date Placeholder 3"/>
+          <p:cNvPr id="234918479" name="Date Placeholder 3"/>
           <p:cNvSpPr>
             <a:spLocks noGrp="1"/>
           </p:cNvSpPr>
@@ -14188,7 +14188,7 @@
       </p:sp>
       <p:sp>
         <p:nvSpPr>
-          <p:cNvPr id="1993689306" name="Footer Placeholder 4"/>
+          <p:cNvPr id="850977799" name="Footer Placeholder 4"/>
           <p:cNvSpPr>
             <a:spLocks noGrp="1"/>
           </p:cNvSpPr>
@@ -14210,7 +14210,7 @@
       </p:sp>
       <p:sp>
         <p:nvSpPr>
-          <p:cNvPr id="1425388220" name="Slide Number Placeholder 5"/>
+          <p:cNvPr id="392268584" name="Slide Number Placeholder 5"/>
           <p:cNvSpPr>
             <a:spLocks noGrp="1"/>
           </p:cNvSpPr>
@@ -14261,7 +14261,7 @@
       </p:grpSpPr>
       <p:sp>
         <p:nvSpPr>
-          <p:cNvPr id="278564499" name="Vertical Title 1"/>
+          <p:cNvPr id="2003303230" name="Vertical Title 1"/>
           <p:cNvSpPr>
             <a:spLocks noGrp="1"/>
           </p:cNvSpPr>
@@ -14292,7 +14292,7 @@
       </p:sp>
       <p:sp>
         <p:nvSpPr>
-          <p:cNvPr id="707479133" name="Vertical Text Placeholder 2"/>
+          <p:cNvPr id="1695793276" name="Vertical Text Placeholder 2"/>
           <p:cNvSpPr>
             <a:spLocks noGrp="1"/>
           </p:cNvSpPr>
@@ -14363,7 +14363,7 @@
       </p:sp>
       <p:sp>
         <p:nvSpPr>
-          <p:cNvPr id="996656493" name="Date Placeholder 3"/>
+          <p:cNvPr id="653698014" name="Date Placeholder 3"/>
           <p:cNvSpPr>
             <a:spLocks noGrp="1"/>
           </p:cNvSpPr>
@@ -14389,7 +14389,7 @@
       </p:sp>
       <p:sp>
         <p:nvSpPr>
-          <p:cNvPr id="1276560706" name="Footer Placeholder 4"/>
+          <p:cNvPr id="1830777116" name="Footer Placeholder 4"/>
           <p:cNvSpPr>
             <a:spLocks noGrp="1"/>
           </p:cNvSpPr>
@@ -14411,7 +14411,7 @@
       </p:sp>
       <p:sp>
         <p:nvSpPr>
-          <p:cNvPr id="2094315142" name="Slide Number Placeholder 5"/>
+          <p:cNvPr id="750016203" name="Slide Number Placeholder 5"/>
           <p:cNvSpPr>
             <a:spLocks noGrp="1"/>
           </p:cNvSpPr>
@@ -14462,7 +14462,7 @@
       </p:grpSpPr>
       <p:sp>
         <p:nvSpPr>
-          <p:cNvPr id="967527491" name="Rectangle 8"/>
+          <p:cNvPr id="269251802" name="Rectangle 8"/>
           <p:cNvSpPr/>
           <p:nvPr/>
         </p:nvSpPr>
@@ -14502,7 +14502,7 @@
       </p:sp>
       <p:sp>
         <p:nvSpPr>
-          <p:cNvPr id="1603339215" name="Oval 5"/>
+          <p:cNvPr id="409044567" name="Oval 5"/>
           <p:cNvSpPr/>
           <p:nvPr/>
         </p:nvSpPr>
@@ -23103,7 +23103,7 @@
       </p:sp>
       <p:sp>
         <p:nvSpPr>
-          <p:cNvPr id="1931957208" name="Title 1"/>
+          <p:cNvPr id="1146961825" name="Title 1"/>
           <p:cNvSpPr>
             <a:spLocks noGrp="1"/>
           </p:cNvSpPr>
@@ -23140,7 +23140,7 @@
       </p:sp>
       <p:sp>
         <p:nvSpPr>
-          <p:cNvPr id="485153670" name="Text Placeholder 2"/>
+          <p:cNvPr id="481496403" name="Text Placeholder 2"/>
           <p:cNvSpPr>
             <a:spLocks noGrp="1"/>
           </p:cNvSpPr>
@@ -23271,7 +23271,7 @@
       </p:sp>
       <p:sp>
         <p:nvSpPr>
-          <p:cNvPr id="1518723201" name="Date Placeholder 3"/>
+          <p:cNvPr id="1729008516" name="Date Placeholder 3"/>
           <p:cNvSpPr>
             <a:spLocks noGrp="1"/>
           </p:cNvSpPr>
@@ -23297,7 +23297,7 @@
       </p:sp>
       <p:sp>
         <p:nvSpPr>
-          <p:cNvPr id="1519437343" name="Footer Placeholder 4"/>
+          <p:cNvPr id="1454357856" name="Footer Placeholder 4"/>
           <p:cNvSpPr>
             <a:spLocks noGrp="1"/>
           </p:cNvSpPr>
@@ -23319,7 +23319,7 @@
       </p:sp>
       <p:sp>
         <p:nvSpPr>
-          <p:cNvPr id="1397552213" name="Slide Number Placeholder 5"/>
+          <p:cNvPr id="1584959234" name="Slide Number Placeholder 5"/>
           <p:cNvSpPr>
             <a:spLocks noGrp="1"/>
           </p:cNvSpPr>
@@ -23345,7 +23345,7 @@
       </p:sp>
       <p:cxnSp>
         <p:nvCxnSpPr>
-          <p:cNvPr id="1714523149" name="Straight Connector 7"/>
+          <p:cNvPr id="1142181152" name="Straight Connector 7"/>
           <p:cNvCxnSpPr/>
           <p:nvPr/>
         </p:nvCxnSpPr>
@@ -23407,7 +23407,7 @@
       </p:grpSpPr>
       <p:sp>
         <p:nvSpPr>
-          <p:cNvPr id="1532005808" name="Title 1"/>
+          <p:cNvPr id="1049617238" name="Title 1"/>
           <p:cNvSpPr>
             <a:spLocks noGrp="1"/>
           </p:cNvSpPr>
@@ -23438,7 +23438,7 @@
       </p:sp>
       <p:sp>
         <p:nvSpPr>
-          <p:cNvPr id="1434894819" name="Content Placeholder 2"/>
+          <p:cNvPr id="385653222" name="Content Placeholder 2"/>
           <p:cNvSpPr>
             <a:spLocks noGrp="1"/>
           </p:cNvSpPr>
@@ -23509,7 +23509,7 @@
       </p:sp>
       <p:sp>
         <p:nvSpPr>
-          <p:cNvPr id="1186481795" name="Content Placeholder 3"/>
+          <p:cNvPr id="1931116112" name="Content Placeholder 3"/>
           <p:cNvSpPr>
             <a:spLocks noGrp="1"/>
           </p:cNvSpPr>
@@ -23580,7 +23580,7 @@
       </p:sp>
       <p:sp>
         <p:nvSpPr>
-          <p:cNvPr id="565777820" name="Date Placeholder 4"/>
+          <p:cNvPr id="116854863" name="Date Placeholder 4"/>
           <p:cNvSpPr>
             <a:spLocks noGrp="1"/>
           </p:cNvSpPr>
@@ -23606,7 +23606,7 @@
       </p:sp>
       <p:sp>
         <p:nvSpPr>
-          <p:cNvPr id="223112210" name="Footer Placeholder 5"/>
+          <p:cNvPr id="1583028054" name="Footer Placeholder 5"/>
           <p:cNvSpPr>
             <a:spLocks noGrp="1"/>
           </p:cNvSpPr>
@@ -23628,7 +23628,7 @@
       </p:sp>
       <p:sp>
         <p:nvSpPr>
-          <p:cNvPr id="265572571" name="Slide Number Placeholder 6"/>
+          <p:cNvPr id="1327881339" name="Slide Number Placeholder 6"/>
           <p:cNvSpPr>
             <a:spLocks noGrp="1"/>
           </p:cNvSpPr>
@@ -23679,7 +23679,7 @@
       </p:grpSpPr>
       <p:sp>
         <p:nvSpPr>
-          <p:cNvPr id="1941723131" name="Title 9"/>
+          <p:cNvPr id="948099119" name="Title 9"/>
           <p:cNvSpPr>
             <a:spLocks noGrp="1"/>
           </p:cNvSpPr>
@@ -23705,7 +23705,7 @@
       </p:sp>
       <p:sp>
         <p:nvSpPr>
-          <p:cNvPr id="1823510537" name="Text Placeholder 2"/>
+          <p:cNvPr id="1765370364" name="Text Placeholder 2"/>
           <p:cNvSpPr>
             <a:spLocks noGrp="1"/>
           </p:cNvSpPr>
@@ -23786,7 +23786,7 @@
       </p:sp>
       <p:sp>
         <p:nvSpPr>
-          <p:cNvPr id="1735544928" name="Content Placeholder 3"/>
+          <p:cNvPr id="371115873" name="Content Placeholder 3"/>
           <p:cNvSpPr>
             <a:spLocks noGrp="1"/>
           </p:cNvSpPr>
@@ -23857,7 +23857,7 @@
       </p:sp>
       <p:sp>
         <p:nvSpPr>
-          <p:cNvPr id="1505468678" name="Text Placeholder 4"/>
+          <p:cNvPr id="110872312" name="Text Placeholder 4"/>
           <p:cNvSpPr>
             <a:spLocks noGrp="1"/>
           </p:cNvSpPr>
@@ -23947,7 +23947,7 @@
       </p:sp>
       <p:sp>
         <p:nvSpPr>
-          <p:cNvPr id="1202470514" name="Content Placeholder 5"/>
+          <p:cNvPr id="1726419852" name="Content Placeholder 5"/>
           <p:cNvSpPr>
             <a:spLocks noGrp="1"/>
           </p:cNvSpPr>
@@ -24018,7 +24018,7 @@
       </p:sp>
       <p:sp>
         <p:nvSpPr>
-          <p:cNvPr id="394781069" name="Date Placeholder 6"/>
+          <p:cNvPr id="362480798" name="Date Placeholder 6"/>
           <p:cNvSpPr>
             <a:spLocks noGrp="1"/>
           </p:cNvSpPr>
@@ -24044,7 +24044,7 @@
       </p:sp>
       <p:sp>
         <p:nvSpPr>
-          <p:cNvPr id="1482592231" name="Footer Placeholder 7"/>
+          <p:cNvPr id="235495421" name="Footer Placeholder 7"/>
           <p:cNvSpPr>
             <a:spLocks noGrp="1"/>
           </p:cNvSpPr>
@@ -24066,7 +24066,7 @@
       </p:sp>
       <p:sp>
         <p:nvSpPr>
-          <p:cNvPr id="1031448419" name="Slide Number Placeholder 8"/>
+          <p:cNvPr id="755938990" name="Slide Number Placeholder 8"/>
           <p:cNvSpPr>
             <a:spLocks noGrp="1"/>
           </p:cNvSpPr>
@@ -24117,7 +24117,7 @@
       </p:grpSpPr>
       <p:sp>
         <p:nvSpPr>
-          <p:cNvPr id="1462704907" name="Title 1"/>
+          <p:cNvPr id="456394394" name="Title 1"/>
           <p:cNvSpPr>
             <a:spLocks noGrp="1"/>
           </p:cNvSpPr>
@@ -24143,7 +24143,7 @@
       </p:sp>
       <p:sp>
         <p:nvSpPr>
-          <p:cNvPr id="189621852" name="Date Placeholder 2"/>
+          <p:cNvPr id="1541072042" name="Date Placeholder 2"/>
           <p:cNvSpPr>
             <a:spLocks noGrp="1"/>
           </p:cNvSpPr>
@@ -24169,7 +24169,7 @@
       </p:sp>
       <p:sp>
         <p:nvSpPr>
-          <p:cNvPr id="1338710595" name="Footer Placeholder 3"/>
+          <p:cNvPr id="320887426" name="Footer Placeholder 3"/>
           <p:cNvSpPr>
             <a:spLocks noGrp="1"/>
           </p:cNvSpPr>
@@ -24191,7 +24191,7 @@
       </p:sp>
       <p:sp>
         <p:nvSpPr>
-          <p:cNvPr id="275338686" name="Slide Number Placeholder 4"/>
+          <p:cNvPr id="1045578312" name="Slide Number Placeholder 4"/>
           <p:cNvSpPr>
             <a:spLocks noGrp="1"/>
           </p:cNvSpPr>
@@ -24242,7 +24242,7 @@
       </p:grpSpPr>
       <p:sp>
         <p:nvSpPr>
-          <p:cNvPr id="1961596141" name="Date Placeholder 1"/>
+          <p:cNvPr id="440544028" name="Date Placeholder 1"/>
           <p:cNvSpPr>
             <a:spLocks noGrp="1"/>
           </p:cNvSpPr>
@@ -24268,7 +24268,7 @@
       </p:sp>
       <p:sp>
         <p:nvSpPr>
-          <p:cNvPr id="846991157" name="Footer Placeholder 2"/>
+          <p:cNvPr id="407321760" name="Footer Placeholder 2"/>
           <p:cNvSpPr>
             <a:spLocks noGrp="1"/>
           </p:cNvSpPr>
@@ -24290,7 +24290,7 @@
       </p:sp>
       <p:sp>
         <p:nvSpPr>
-          <p:cNvPr id="1595324224" name="Slide Number Placeholder 3"/>
+          <p:cNvPr id="1215781115" name="Slide Number Placeholder 3"/>
           <p:cNvSpPr>
             <a:spLocks noGrp="1"/>
           </p:cNvSpPr>
@@ -24341,7 +24341,7 @@
       </p:grpSpPr>
       <p:sp>
         <p:nvSpPr>
-          <p:cNvPr id="1451629227" name="Title 7"/>
+          <p:cNvPr id="1138818764" name="Title 7"/>
           <p:cNvSpPr>
             <a:spLocks noGrp="1"/>
           </p:cNvSpPr>
@@ -24381,7 +24381,7 @@
       </p:sp>
       <p:sp>
         <p:nvSpPr>
-          <p:cNvPr id="151472799" name="Content Placeholder 2"/>
+          <p:cNvPr id="937346" name="Content Placeholder 2"/>
           <p:cNvSpPr>
             <a:spLocks noGrp="1"/>
           </p:cNvSpPr>
@@ -24480,7 +24480,7 @@
       </p:sp>
       <p:sp>
         <p:nvSpPr>
-          <p:cNvPr id="1034481909" name="Text Placeholder 3"/>
+          <p:cNvPr id="1953266859" name="Text Placeholder 3"/>
           <p:cNvSpPr>
             <a:spLocks noGrp="1"/>
           </p:cNvSpPr>
@@ -24556,7 +24556,7 @@
       </p:sp>
       <p:sp>
         <p:nvSpPr>
-          <p:cNvPr id="1956118182" name="Date Placeholder 4"/>
+          <p:cNvPr id="1041991516" name="Date Placeholder 4"/>
           <p:cNvSpPr>
             <a:spLocks noGrp="1"/>
           </p:cNvSpPr>
@@ -24582,7 +24582,7 @@
       </p:sp>
       <p:sp>
         <p:nvSpPr>
-          <p:cNvPr id="1784178325" name="Footer Placeholder 5"/>
+          <p:cNvPr id="273692384" name="Footer Placeholder 5"/>
           <p:cNvSpPr>
             <a:spLocks noGrp="1"/>
           </p:cNvSpPr>
@@ -24604,7 +24604,7 @@
       </p:sp>
       <p:sp>
         <p:nvSpPr>
-          <p:cNvPr id="52541469" name="Slide Number Placeholder 6"/>
+          <p:cNvPr id="965354924" name="Slide Number Placeholder 6"/>
           <p:cNvSpPr>
             <a:spLocks noGrp="1"/>
           </p:cNvSpPr>
@@ -24655,7 +24655,7 @@
       </p:grpSpPr>
       <p:sp>
         <p:nvSpPr>
-          <p:cNvPr id="3309405" name="Title 1"/>
+          <p:cNvPr id="388018053" name="Title 1"/>
           <p:cNvSpPr>
             <a:spLocks noGrp="1"/>
           </p:cNvSpPr>
@@ -24692,7 +24692,7 @@
       </p:sp>
       <p:sp>
         <p:nvSpPr>
-          <p:cNvPr id="1056826300" name="Picture Placeholder 2"/>
+          <p:cNvPr id="2092441655" name="Picture Placeholder 2"/>
           <p:cNvSpPr>
             <a:spLocks noChangeAspect="1" noGrp="1"/>
           </p:cNvSpPr>
@@ -24765,7 +24765,7 @@
       </p:sp>
       <p:sp>
         <p:nvSpPr>
-          <p:cNvPr id="1427132808" name="Text Placeholder 3"/>
+          <p:cNvPr id="1336847859" name="Text Placeholder 3"/>
           <p:cNvSpPr>
             <a:spLocks noGrp="1"/>
           </p:cNvSpPr>
@@ -24848,7 +24848,7 @@
       </p:sp>
       <p:sp>
         <p:nvSpPr>
-          <p:cNvPr id="2116290785" name="Date Placeholder 4"/>
+          <p:cNvPr id="928033381" name="Date Placeholder 4"/>
           <p:cNvSpPr>
             <a:spLocks noGrp="1"/>
           </p:cNvSpPr>
@@ -24874,7 +24874,7 @@
       </p:sp>
       <p:sp>
         <p:nvSpPr>
-          <p:cNvPr id="1640275349" name="Footer Placeholder 5"/>
+          <p:cNvPr id="1282322532" name="Footer Placeholder 5"/>
           <p:cNvSpPr>
             <a:spLocks noGrp="1"/>
           </p:cNvSpPr>
@@ -24896,7 +24896,7 @@
       </p:sp>
       <p:sp>
         <p:nvSpPr>
-          <p:cNvPr id="47143398" name="Slide Number Placeholder 6"/>
+          <p:cNvPr id="1787669543" name="Slide Number Placeholder 6"/>
           <p:cNvSpPr>
             <a:spLocks noGrp="1"/>
           </p:cNvSpPr>
@@ -24922,7 +24922,7 @@
       </p:sp>
       <p:cxnSp>
         <p:nvCxnSpPr>
-          <p:cNvPr id="925064283" name="Straight Connector 7"/>
+          <p:cNvPr id="530213814" name="Straight Connector 7"/>
           <p:cNvCxnSpPr/>
           <p:nvPr/>
         </p:nvCxnSpPr>
@@ -24987,7 +24987,7 @@
       </p:grpSpPr>
       <p:sp>
         <p:nvSpPr>
-          <p:cNvPr id="1505546327" name="Title Placeholder 1"/>
+          <p:cNvPr id="947559036" name="Title Placeholder 1"/>
           <p:cNvSpPr>
             <a:spLocks noGrp="1"/>
           </p:cNvSpPr>
@@ -25023,7 +25023,7 @@
       </p:sp>
       <p:sp>
         <p:nvSpPr>
-          <p:cNvPr id="2139721851" name="Text Placeholder 2"/>
+          <p:cNvPr id="572718079" name="Text Placeholder 2"/>
           <p:cNvSpPr>
             <a:spLocks noGrp="1"/>
           </p:cNvSpPr>
@@ -25099,7 +25099,7 @@
       </p:sp>
       <p:sp>
         <p:nvSpPr>
-          <p:cNvPr id="708839441" name="Date Placeholder 3"/>
+          <p:cNvPr id="198187381" name="Date Placeholder 3"/>
           <p:cNvSpPr>
             <a:spLocks noGrp="1"/>
           </p:cNvSpPr>
@@ -25145,7 +25145,7 @@
       </p:sp>
       <p:sp>
         <p:nvSpPr>
-          <p:cNvPr id="195572931" name="Footer Placeholder 4"/>
+          <p:cNvPr id="978265980" name="Footer Placeholder 4"/>
           <p:cNvSpPr>
             <a:spLocks noGrp="1"/>
           </p:cNvSpPr>
@@ -25187,7 +25187,7 @@
       </p:sp>
       <p:sp>
         <p:nvSpPr>
-          <p:cNvPr id="117264970" name="Slide Number Placeholder 5"/>
+          <p:cNvPr id="1911604732" name="Slide Number Placeholder 5"/>
           <p:cNvSpPr>
             <a:spLocks noGrp="1"/>
           </p:cNvSpPr>
@@ -25233,7 +25233,7 @@
       </p:sp>
       <p:cxnSp>
         <p:nvCxnSpPr>
-          <p:cNvPr id="878263438" name="Straight Connector 6"/>
+          <p:cNvPr id="1485035582" name="Straight Connector 6"/>
           <p:cNvCxnSpPr/>
           <p:nvPr/>
         </p:nvCxnSpPr>
@@ -25647,7 +25647,7 @@
       </p:grpSpPr>
       <p:sp>
         <p:nvSpPr>
-          <p:cNvPr id="445800956" name="Title Placeholder 1"/>
+          <p:cNvPr id="874076123" name="Title Placeholder 1"/>
           <p:cNvSpPr>
             <a:spLocks noGrp="1"/>
           </p:cNvSpPr>
@@ -25683,7 +25683,7 @@
       </p:sp>
       <p:sp>
         <p:nvSpPr>
-          <p:cNvPr id="1160738432" name="Text Placeholder 2"/>
+          <p:cNvPr id="2024530643" name="Text Placeholder 2"/>
           <p:cNvSpPr>
             <a:spLocks noGrp="1"/>
           </p:cNvSpPr>
@@ -25759,7 +25759,7 @@
       </p:sp>
       <p:sp>
         <p:nvSpPr>
-          <p:cNvPr id="1714894528" name="Date Placeholder 3"/>
+          <p:cNvPr id="1925990950" name="Date Placeholder 3"/>
           <p:cNvSpPr>
             <a:spLocks noGrp="1"/>
           </p:cNvSpPr>
@@ -25803,7 +25803,7 @@
       </p:sp>
       <p:sp>
         <p:nvSpPr>
-          <p:cNvPr id="1989355807" name="Footer Placeholder 4"/>
+          <p:cNvPr id="1214091174" name="Footer Placeholder 4"/>
           <p:cNvSpPr>
             <a:spLocks noGrp="1"/>
           </p:cNvSpPr>
@@ -25843,7 +25843,7 @@
       </p:sp>
       <p:sp>
         <p:nvSpPr>
-          <p:cNvPr id="684069795" name="Slide Number Placeholder 5"/>
+          <p:cNvPr id="1434862606" name="Slide Number Placeholder 5"/>
           <p:cNvSpPr>
             <a:spLocks noGrp="1"/>
           </p:cNvSpPr>
@@ -26173,7 +26173,7 @@
       </p:grpSpPr>
       <p:sp>
         <p:nvSpPr>
-          <p:cNvPr id="343029271" name="Title 1"/>
+          <p:cNvPr id="110069803" name="Title 1"/>
           <p:cNvSpPr>
             <a:spLocks noGrp="1"/>
           </p:cNvSpPr>
@@ -26182,9 +26182,9 @@
           </p:nvPr>
         </p:nvSpPr>
         <p:spPr bwMode="auto">
-          <a:xfrm>
-            <a:off x="-1366461" y="4960137"/>
-            <a:ext cx="9596061" cy="1463040"/>
+          <a:xfrm flipH="0" flipV="0">
+            <a:off x="144093" y="4960136"/>
+            <a:ext cx="8085506" cy="1463040"/>
           </a:xfrm>
         </p:spPr>
         <p:txBody>
@@ -26243,7 +26243,7 @@
       </p:sp>
       <p:sp>
         <p:nvSpPr>
-          <p:cNvPr id="143990701" name="Subtitle 2"/>
+          <p:cNvPr id="839208629" name="Subtitle 2"/>
           <p:cNvSpPr>
             <a:spLocks noGrp="1"/>
           </p:cNvSpPr>
@@ -26361,7 +26361,7 @@
       </p:grpSpPr>
       <p:sp>
         <p:nvSpPr>
-          <p:cNvPr id="639891461" name="Rectangle 1"/>
+          <p:cNvPr id="1366385884" name="Rectangle 1"/>
           <p:cNvSpPr/>
           <p:nvPr/>
         </p:nvSpPr>
@@ -26430,7 +26430,7 @@
       </p:sp>
       <p:sp>
         <p:nvSpPr>
-          <p:cNvPr id="802566497" name="TextBox 2"/>
+          <p:cNvPr id="282401772" name="TextBox 2"/>
           <p:cNvSpPr txBox="1"/>
           <p:nvPr/>
         </p:nvSpPr>
@@ -26491,7 +26491,7 @@
       </p:sp>
       <p:sp>
         <p:nvSpPr>
-          <p:cNvPr id="874630132" name="Rectangle 3"/>
+          <p:cNvPr id="2131875211" name="Rectangle 3"/>
           <p:cNvSpPr/>
           <p:nvPr/>
         </p:nvSpPr>
@@ -26593,7 +26593,7 @@
       </p:sp>
       <p:sp>
         <p:nvSpPr>
-          <p:cNvPr id="1746047972" name="Rectangle 4"/>
+          <p:cNvPr id="955356849" name="Rectangle 4"/>
           <p:cNvSpPr/>
           <p:nvPr/>
         </p:nvSpPr>
@@ -26695,7 +26695,7 @@
       </p:sp>
       <p:sp>
         <p:nvSpPr>
-          <p:cNvPr id="683929447" name="Rectangle 5"/>
+          <p:cNvPr id="485710884" name="Rectangle 5"/>
           <p:cNvSpPr/>
           <p:nvPr/>
         </p:nvSpPr>
@@ -26797,7 +26797,7 @@
       </p:sp>
       <p:sp>
         <p:nvSpPr>
-          <p:cNvPr id="671686217" name="Rounded Rectangle 6"/>
+          <p:cNvPr id="1918108639" name="Rounded Rectangle 6"/>
           <p:cNvSpPr/>
           <p:nvPr/>
         </p:nvSpPr>
@@ -27026,7 +27026,7 @@
       </p:grpSpPr>
       <p:sp>
         <p:nvSpPr>
-          <p:cNvPr id="668718403" name="Rectangle 1"/>
+          <p:cNvPr id="1792549691" name="Rectangle 1"/>
           <p:cNvSpPr/>
           <p:nvPr/>
         </p:nvSpPr>
@@ -27095,7 +27095,7 @@
       </p:sp>
       <p:sp>
         <p:nvSpPr>
-          <p:cNvPr id="1026207227" name="TextBox 2"/>
+          <p:cNvPr id="437502650" name="TextBox 2"/>
           <p:cNvSpPr txBox="1"/>
           <p:nvPr/>
         </p:nvSpPr>
@@ -27159,7 +27159,7 @@
       </p:sp>
       <p:sp>
         <p:nvSpPr>
-          <p:cNvPr id="1958140359" name="Rectangle 3"/>
+          <p:cNvPr id="764126263" name="Rectangle 3"/>
           <p:cNvSpPr/>
           <p:nvPr/>
         </p:nvSpPr>
@@ -27255,7 +27255,7 @@
       </p:sp>
       <p:sp>
         <p:nvSpPr>
-          <p:cNvPr id="1045167752" name="Rectangle 5"/>
+          <p:cNvPr id="1330622036" name="Rectangle 5"/>
           <p:cNvSpPr/>
           <p:nvPr/>
         </p:nvSpPr>
@@ -27435,7 +27435,7 @@
       </p:sp>
       <p:sp>
         <p:nvSpPr>
-          <p:cNvPr id="1944702953" name="Rectangle 7"/>
+          <p:cNvPr id="173329224" name="Rectangle 7"/>
           <p:cNvSpPr/>
           <p:nvPr/>
         </p:nvSpPr>
@@ -27539,13 +27539,13 @@
       </p:sp>
       <p:sp>
         <p:nvSpPr>
-          <p:cNvPr id="495836470" name="Rounded Rectangle 8"/>
+          <p:cNvPr id="1950840522" name="Rounded Rectangle 8"/>
           <p:cNvSpPr/>
           <p:nvPr/>
         </p:nvSpPr>
         <p:spPr bwMode="auto">
           <a:xfrm>
-            <a:off x="988827" y="3931920"/>
+            <a:off x="988826" y="3931920"/>
             <a:ext cx="9909544" cy="1280160"/>
           </a:xfrm>
           <a:prstGeom prst="roundRect">
@@ -27635,10 +27635,10 @@
       </p:sp>
       <p:cxnSp>
         <p:nvCxnSpPr>
-          <p:cNvPr id="149004099" name="Straight Arrow Connector 10"/>
+          <p:cNvPr id="731360859" name="Straight Arrow Connector 10"/>
           <p:cNvCxnSpPr>
-            <a:stCxn id="1958140359" idx="3"/>
-            <a:endCxn id="1045167752" idx="1"/>
+            <a:stCxn id="764126263" idx="3"/>
+            <a:endCxn id="1330622036" idx="1"/>
           </p:cNvCxnSpPr>
           <p:nvPr/>
         </p:nvCxnSpPr>
@@ -27671,10 +27671,10 @@
       </p:cxnSp>
       <p:cxnSp>
         <p:nvCxnSpPr>
-          <p:cNvPr id="1095260401" name="Straight Arrow Connector 11"/>
+          <p:cNvPr id="1447481541" name="Straight Arrow Connector 11"/>
           <p:cNvCxnSpPr>
-            <a:stCxn id="1045167752" idx="3"/>
-            <a:endCxn id="1944702953" idx="1"/>
+            <a:stCxn id="1330622036" idx="3"/>
+            <a:endCxn id="173329224" idx="1"/>
           </p:cNvCxnSpPr>
           <p:nvPr/>
         </p:nvCxnSpPr>
@@ -27740,7 +27740,7 @@
       </p:grpSpPr>
       <p:sp>
         <p:nvSpPr>
-          <p:cNvPr id="1347621460" name="Rectangle 1"/>
+          <p:cNvPr id="1002217113" name="Rectangle 1"/>
           <p:cNvSpPr/>
           <p:nvPr/>
         </p:nvSpPr>
@@ -27809,7 +27809,7 @@
       </p:sp>
       <p:sp>
         <p:nvSpPr>
-          <p:cNvPr id="1772183774" name="TextBox 2"/>
+          <p:cNvPr id="1194830333" name="TextBox 2"/>
           <p:cNvSpPr txBox="1"/>
           <p:nvPr/>
         </p:nvSpPr>
@@ -27873,7 +27873,7 @@
       </p:sp>
       <p:sp>
         <p:nvSpPr>
-          <p:cNvPr id="1324047762" name="Rounded Rectangle 5"/>
+          <p:cNvPr id="2020445262" name="Rounded Rectangle 5"/>
           <p:cNvSpPr/>
           <p:nvPr/>
         </p:nvSpPr>
@@ -28020,7 +28020,7 @@
       </p:sp>
       <p:sp>
         <p:nvSpPr>
-          <p:cNvPr id="1360255356" name="Rounded Rectangle 6"/>
+          <p:cNvPr id="664815442" name="Rounded Rectangle 6"/>
           <p:cNvSpPr/>
           <p:nvPr/>
         </p:nvSpPr>
@@ -28167,7 +28167,7 @@
       </p:sp>
       <p:pic>
         <p:nvPicPr>
-          <p:cNvPr id="503309109" name="Picture 16"/>
+          <p:cNvPr id="1990217104" name="Picture 16"/>
           <p:cNvPicPr>
             <a:picLocks noChangeAspect="1"/>
           </p:cNvPicPr>
@@ -28199,7 +28199,7 @@
       </p:pic>
       <p:pic>
         <p:nvPicPr>
-          <p:cNvPr id="972164663" name="Picture 18"/>
+          <p:cNvPr id="242458477" name="Picture 18"/>
           <p:cNvPicPr>
             <a:picLocks noChangeAspect="1"/>
           </p:cNvPicPr>
@@ -28264,7 +28264,7 @@
       </p:grpSpPr>
       <p:sp>
         <p:nvSpPr>
-          <p:cNvPr id="1094396862" name="Rectangle 1"/>
+          <p:cNvPr id="186614916" name="Rectangle 1"/>
           <p:cNvSpPr/>
           <p:nvPr/>
         </p:nvSpPr>
@@ -28333,7 +28333,7 @@
       </p:sp>
       <p:sp>
         <p:nvSpPr>
-          <p:cNvPr id="1305962446" name="TextBox 2"/>
+          <p:cNvPr id="287211284" name="TextBox 2"/>
           <p:cNvSpPr txBox="1"/>
           <p:nvPr/>
         </p:nvSpPr>
@@ -28397,7 +28397,7 @@
       </p:sp>
       <p:sp>
         <p:nvSpPr>
-          <p:cNvPr id="47776750" name="Rectangle 3"/>
+          <p:cNvPr id="13208267" name="Rectangle 3"/>
           <p:cNvSpPr/>
           <p:nvPr/>
         </p:nvSpPr>
@@ -28478,7 +28478,7 @@
       </p:sp>
       <p:sp>
         <p:nvSpPr>
-          <p:cNvPr id="1698743017" name="Rectangle 5"/>
+          <p:cNvPr id="1610054304" name="Rectangle 5"/>
           <p:cNvSpPr/>
           <p:nvPr/>
         </p:nvSpPr>
@@ -28559,7 +28559,7 @@
       </p:sp>
       <p:sp>
         <p:nvSpPr>
-          <p:cNvPr id="1568702242" name="Rectangle 7"/>
+          <p:cNvPr id="1624960302" name="Rectangle 7"/>
           <p:cNvSpPr/>
           <p:nvPr/>
         </p:nvSpPr>
@@ -28640,7 +28640,7 @@
       </p:sp>
       <p:sp>
         <p:nvSpPr>
-          <p:cNvPr id="1039377854" name="Rectangle 9"/>
+          <p:cNvPr id="1375235392" name="Rectangle 9"/>
           <p:cNvSpPr/>
           <p:nvPr/>
         </p:nvSpPr>
@@ -28721,7 +28721,7 @@
       </p:sp>
       <p:sp>
         <p:nvSpPr>
-          <p:cNvPr id="746992364" name="Rounded Rectangle 14"/>
+          <p:cNvPr id="863156312" name="Rounded Rectangle 14"/>
           <p:cNvSpPr/>
           <p:nvPr/>
         </p:nvSpPr>
@@ -28871,10 +28871,10 @@
       </p:sp>
       <p:cxnSp>
         <p:nvCxnSpPr>
-          <p:cNvPr id="74493034" name="Straight Arrow Connector 22"/>
+          <p:cNvPr id="135392077" name="Straight Arrow Connector 22"/>
           <p:cNvCxnSpPr>
-            <a:stCxn id="47776750" idx="3"/>
-            <a:endCxn id="1698743017" idx="1"/>
+            <a:stCxn id="13208267" idx="3"/>
+            <a:endCxn id="1610054304" idx="1"/>
           </p:cNvCxnSpPr>
           <p:nvPr/>
         </p:nvCxnSpPr>
@@ -28907,7 +28907,7 @@
       </p:cxnSp>
       <p:cxnSp>
         <p:nvCxnSpPr>
-          <p:cNvPr id="488247590" name="Straight Arrow Connector 23"/>
+          <p:cNvPr id="755213228" name="Straight Arrow Connector 23"/>
           <p:cNvCxnSpPr/>
           <p:nvPr/>
         </p:nvCxnSpPr>
@@ -28940,7 +28940,7 @@
       </p:cxnSp>
       <p:cxnSp>
         <p:nvCxnSpPr>
-          <p:cNvPr id="824405286" name="Straight Arrow Connector 26"/>
+          <p:cNvPr id="1435767053" name="Straight Arrow Connector 26"/>
           <p:cNvCxnSpPr/>
           <p:nvPr/>
         </p:nvCxnSpPr>
@@ -28973,7 +28973,7 @@
       </p:cxnSp>
       <p:sp>
         <p:nvSpPr>
-          <p:cNvPr id="1112301732" name="Rounded Rectangle 14"/>
+          <p:cNvPr id="2073601356" name="Rounded Rectangle 14"/>
           <p:cNvSpPr/>
           <p:nvPr/>
         </p:nvSpPr>
@@ -29033,7 +29033,7 @@
       </p:sp>
       <p:pic>
         <p:nvPicPr>
-          <p:cNvPr id="1168799152" name="Picture 31"/>
+          <p:cNvPr id="871715517" name="Picture 31"/>
           <p:cNvPicPr>
             <a:picLocks noChangeAspect="1"/>
           </p:cNvPicPr>
@@ -29101,7 +29101,7 @@
       </p:grpSpPr>
       <p:sp>
         <p:nvSpPr>
-          <p:cNvPr id="2124399222" name="Rectangle 1"/>
+          <p:cNvPr id="600468208" name="Rectangle 1"/>
           <p:cNvSpPr/>
           <p:nvPr/>
         </p:nvSpPr>
@@ -29170,7 +29170,7 @@
       </p:sp>
       <p:sp>
         <p:nvSpPr>
-          <p:cNvPr id="166424942" name="TextBox 2"/>
+          <p:cNvPr id="1503925793" name="TextBox 2"/>
           <p:cNvSpPr txBox="1"/>
           <p:nvPr/>
         </p:nvSpPr>
@@ -29234,7 +29234,7 @@
       </p:sp>
       <p:sp>
         <p:nvSpPr>
-          <p:cNvPr id="1420581441" name="Rounded Rectangle 14"/>
+          <p:cNvPr id="1797257289" name="Rounded Rectangle 14"/>
           <p:cNvSpPr/>
           <p:nvPr/>
         </p:nvSpPr>
@@ -29323,7 +29323,7 @@
       </p:sp>
       <p:graphicFrame>
         <p:nvGraphicFramePr>
-          <p:cNvPr id="588377026" name="Table 8"/>
+          <p:cNvPr id="390160568" name="Table 8"/>
           <p:cNvGraphicFramePr>
             <a:graphicFrameLocks xmlns:a="http://schemas.openxmlformats.org/drawingml/2006/main" noGrp="1"/>
           </p:cNvGraphicFramePr>
@@ -30198,7 +30198,7 @@
       </p:grpSpPr>
       <p:sp>
         <p:nvSpPr>
-          <p:cNvPr id="1573339718" name="Rectangle 1"/>
+          <p:cNvPr id="904116448" name="Rectangle 1"/>
           <p:cNvSpPr/>
           <p:nvPr/>
         </p:nvSpPr>
@@ -30267,7 +30267,7 @@
       </p:sp>
       <p:sp>
         <p:nvSpPr>
-          <p:cNvPr id="1916166445" name="TextBox 2"/>
+          <p:cNvPr id="1041245469" name="TextBox 2"/>
           <p:cNvSpPr txBox="1"/>
           <p:nvPr/>
         </p:nvSpPr>
@@ -30309,7 +30309,7 @@
       </p:sp>
       <p:sp>
         <p:nvSpPr>
-          <p:cNvPr id="1184713322" name="Rectangle 3"/>
+          <p:cNvPr id="583807823" name="Rectangle 3"/>
           <p:cNvSpPr/>
           <p:nvPr/>
         </p:nvSpPr>
@@ -30442,7 +30442,7 @@
       </p:sp>
       <p:cxnSp>
         <p:nvCxnSpPr>
-          <p:cNvPr id="945814281" name="Connector 4"/>
+          <p:cNvPr id="1955649214" name="Connector 4"/>
           <p:cNvCxnSpPr/>
           <p:nvPr/>
         </p:nvCxnSpPr>
@@ -30477,7 +30477,7 @@
       </p:cxnSp>
       <p:sp>
         <p:nvSpPr>
-          <p:cNvPr id="919976388" name="Rectangle 5"/>
+          <p:cNvPr id="1085740382" name="Rectangle 5"/>
           <p:cNvSpPr/>
           <p:nvPr/>
         </p:nvSpPr>
@@ -30661,7 +30661,7 @@
       </p:sp>
       <p:cxnSp>
         <p:nvCxnSpPr>
-          <p:cNvPr id="1222565090" name="Connector 6"/>
+          <p:cNvPr id="325872083" name="Connector 6"/>
           <p:cNvCxnSpPr/>
           <p:nvPr/>
         </p:nvCxnSpPr>
@@ -30696,7 +30696,7 @@
       </p:cxnSp>
       <p:sp>
         <p:nvSpPr>
-          <p:cNvPr id="1469830909" name="Rectangle 7"/>
+          <p:cNvPr id="860251676" name="Rectangle 7"/>
           <p:cNvSpPr/>
           <p:nvPr/>
         </p:nvSpPr>
@@ -30831,7 +30831,7 @@
       </p:sp>
       <p:sp>
         <p:nvSpPr>
-          <p:cNvPr id="1473832084" name="Rounded Rectangle 8"/>
+          <p:cNvPr id="600948305" name="Rounded Rectangle 8"/>
           <p:cNvSpPr/>
           <p:nvPr/>
         </p:nvSpPr>
@@ -31104,7 +31104,7 @@
       </p:grpSpPr>
       <p:sp>
         <p:nvSpPr>
-          <p:cNvPr id="398423824" name="Title 1"/>
+          <p:cNvPr id="344219916" name="Title 1"/>
           <p:cNvSpPr>
             <a:spLocks noGrp="1"/>
           </p:cNvSpPr>
@@ -31140,7 +31140,7 @@
       </p:sp>
       <p:sp>
         <p:nvSpPr>
-          <p:cNvPr id="18258931" name="Content Placeholder 2"/>
+          <p:cNvPr id="1218106575" name="Content Placeholder 2"/>
           <p:cNvSpPr>
             <a:spLocks noGrp="1"/>
           </p:cNvSpPr>
@@ -32605,7 +32605,7 @@
       </p:grpSpPr>
       <p:sp>
         <p:nvSpPr>
-          <p:cNvPr id="2132964758" name="Title 1"/>
+          <p:cNvPr id="152316784" name="Title 1"/>
           <p:cNvSpPr>
             <a:spLocks noGrp="1"/>
           </p:cNvSpPr>
@@ -32645,7 +32645,7 @@
       </p:sp>
       <p:pic>
         <p:nvPicPr>
-          <p:cNvPr id="1188565603" name="Picture 5"/>
+          <p:cNvPr id="1121960702" name="Picture 5"/>
           <p:cNvPicPr>
             <a:picLocks noChangeAspect="1"/>
           </p:cNvPicPr>
@@ -32667,7 +32667,7 @@
       </p:pic>
       <p:pic>
         <p:nvPicPr>
-          <p:cNvPr id="1878569560" name="Picture 7" descr="A screen shot of a computer program&#10;&#10;AI-generated content may be incorrect."/>
+          <p:cNvPr id="1389228682" name="Picture 7" descr="A screen shot of a computer program&#10;&#10;AI-generated content may be incorrect."/>
           <p:cNvPicPr>
             <a:picLocks noChangeAspect="1"/>
           </p:cNvPicPr>
@@ -32689,7 +32689,7 @@
       </p:pic>
       <p:sp>
         <p:nvSpPr>
-          <p:cNvPr id="1547228081" name="Rounded Rectangle 8"/>
+          <p:cNvPr id="636741200" name="Rounded Rectangle 8"/>
           <p:cNvSpPr/>
           <p:nvPr/>
         </p:nvSpPr>
@@ -32774,7 +32774,7 @@
       </p:sp>
       <p:sp>
         <p:nvSpPr>
-          <p:cNvPr id="2015631865" name="Rounded Rectangle 8"/>
+          <p:cNvPr id="1259467478" name="Rounded Rectangle 8"/>
           <p:cNvSpPr/>
           <p:nvPr/>
         </p:nvSpPr>
@@ -32892,7 +32892,7 @@
       </p:grpSpPr>
       <p:sp>
         <p:nvSpPr>
-          <p:cNvPr id="1632081074" name="Title 1"/>
+          <p:cNvPr id="1994226190" name="Title 1"/>
           <p:cNvSpPr>
             <a:spLocks noGrp="1"/>
           </p:cNvSpPr>
@@ -32932,7 +32932,7 @@
       </p:sp>
       <p:pic>
         <p:nvPicPr>
-          <p:cNvPr id="604393247" name="Picture 2" descr="A computer screen shot of a program&#10;&#10;AI-generated content may be incorrect."/>
+          <p:cNvPr id="1301014314" name="Picture 2" descr="A computer screen shot of a program&#10;&#10;AI-generated content may be incorrect."/>
           <p:cNvPicPr>
             <a:picLocks noChangeAspect="1"/>
           </p:cNvPicPr>
@@ -32944,7 +32944,7 @@
         </p:blipFill>
         <p:spPr bwMode="auto">
           <a:xfrm>
-            <a:off x="5884227" y="1684653"/>
+            <a:off x="5884227" y="1684652"/>
             <a:ext cx="5686425" cy="4362448"/>
           </a:xfrm>
           <a:prstGeom prst="rect">
@@ -32954,7 +32954,7 @@
       </p:pic>
       <p:pic>
         <p:nvPicPr>
-          <p:cNvPr id="1971925023" name="Picture 4" descr="A screen shot of a computer program&#10;&#10;AI-generated content may be incorrect."/>
+          <p:cNvPr id="1237937972" name="Picture 4" descr="A screen shot of a computer program&#10;&#10;AI-generated content may be incorrect."/>
           <p:cNvPicPr>
             <a:picLocks noChangeAspect="1"/>
           </p:cNvPicPr>
@@ -32976,7 +32976,7 @@
       </p:pic>
       <p:sp>
         <p:nvSpPr>
-          <p:cNvPr id="2098180410" name="Rounded Rectangle 8"/>
+          <p:cNvPr id="686952358" name="Rounded Rectangle 8"/>
           <p:cNvSpPr/>
           <p:nvPr/>
         </p:nvSpPr>
@@ -33094,7 +33094,7 @@
       </p:grpSpPr>
       <p:sp>
         <p:nvSpPr>
-          <p:cNvPr id="665780880" name="Title 1"/>
+          <p:cNvPr id="1550911516" name="Title 1"/>
           <p:cNvSpPr>
             <a:spLocks noGrp="1"/>
           </p:cNvSpPr>
@@ -33130,7 +33130,7 @@
       </p:sp>
       <p:graphicFrame>
         <p:nvGraphicFramePr>
-          <p:cNvPr id="2140023755" name="Content Placeholder 3"/>
+          <p:cNvPr id="643463610" name="Content Placeholder 3"/>
           <p:cNvGraphicFramePr>
             <a:graphicFrameLocks xmlns:a="http://schemas.openxmlformats.org/drawingml/2006/main"/>
           </p:cNvGraphicFramePr>
@@ -33610,7 +33610,7 @@
       </p:grpSpPr>
       <p:sp>
         <p:nvSpPr>
-          <p:cNvPr id="347883879" name="Title 1"/>
+          <p:cNvPr id="699829322" name="Title 1"/>
           <p:cNvSpPr>
             <a:spLocks noGrp="1"/>
           </p:cNvSpPr>
@@ -33644,7 +33644,7 @@
       </p:sp>
       <p:sp>
         <p:nvSpPr>
-          <p:cNvPr id="462948942" name="Content Placeholder 8"/>
+          <p:cNvPr id="1590240702" name="Content Placeholder 8"/>
           <p:cNvSpPr>
             <a:spLocks noGrp="1"/>
           </p:cNvSpPr>
@@ -34038,7 +34038,7 @@
       </p:sp>
       <p:sp>
         <p:nvSpPr>
-          <p:cNvPr id="1111352791" name="Rectangle 9"/>
+          <p:cNvPr id="1540517130" name="Rectangle 9"/>
           <p:cNvSpPr/>
           <p:nvPr/>
         </p:nvSpPr>
@@ -34080,7 +34080,7 @@
       </p:sp>
       <p:sp>
         <p:nvSpPr>
-          <p:cNvPr id="154862359" name="TextBox 10"/>
+          <p:cNvPr id="482984198" name="TextBox 10"/>
           <p:cNvSpPr txBox="1"/>
           <p:nvPr/>
         </p:nvSpPr>
@@ -34118,7 +34118,7 @@
       </p:sp>
       <p:sp>
         <p:nvSpPr>
-          <p:cNvPr id="1957798923" name="TextBox 12"/>
+          <p:cNvPr id="800990346" name="TextBox 12"/>
           <p:cNvSpPr txBox="1"/>
           <p:nvPr/>
         </p:nvSpPr>
@@ -34168,7 +34168,7 @@
       </p:sp>
       <p:sp>
         <p:nvSpPr>
-          <p:cNvPr id="128140771" name="Arrow: Right 13"/>
+          <p:cNvPr id="341607174" name="Arrow: Right 13"/>
           <p:cNvSpPr/>
           <p:nvPr/>
         </p:nvSpPr>
@@ -34213,7 +34213,7 @@
       </p:sp>
       <p:sp>
         <p:nvSpPr>
-          <p:cNvPr id="149612954" name="Rectangle 14"/>
+          <p:cNvPr id="1701558256" name="Rectangle 14"/>
           <p:cNvSpPr/>
           <p:nvPr/>
         </p:nvSpPr>
@@ -34263,7 +34263,7 @@
       </p:sp>
       <p:sp>
         <p:nvSpPr>
-          <p:cNvPr id="1573565249" name="TextBox 15"/>
+          <p:cNvPr id="1527113139" name="TextBox 15"/>
           <p:cNvSpPr txBox="1"/>
           <p:nvPr/>
         </p:nvSpPr>
@@ -34301,7 +34301,7 @@
       </p:sp>
       <p:sp>
         <p:nvSpPr>
-          <p:cNvPr id="572558191" name="TextBox 16"/>
+          <p:cNvPr id="1100598675" name="TextBox 16"/>
           <p:cNvSpPr txBox="1"/>
           <p:nvPr/>
         </p:nvSpPr>
@@ -34339,7 +34339,7 @@
       </p:sp>
       <p:sp>
         <p:nvSpPr>
-          <p:cNvPr id="1040291910" name="Rectangle 18"/>
+          <p:cNvPr id="1745074630" name="Rectangle 18"/>
           <p:cNvSpPr/>
           <p:nvPr/>
         </p:nvSpPr>
@@ -34389,7 +34389,7 @@
       </p:sp>
       <p:sp>
         <p:nvSpPr>
-          <p:cNvPr id="1946975525" name="TextBox 19"/>
+          <p:cNvPr id="1656628986" name="TextBox 19"/>
           <p:cNvSpPr txBox="1"/>
           <p:nvPr/>
         </p:nvSpPr>
@@ -34427,7 +34427,7 @@
       </p:sp>
       <p:sp>
         <p:nvSpPr>
-          <p:cNvPr id="726135299" name="TextBox 20"/>
+          <p:cNvPr id="143701351" name="TextBox 20"/>
           <p:cNvSpPr txBox="1"/>
           <p:nvPr/>
         </p:nvSpPr>
@@ -34465,7 +34465,7 @@
       </p:sp>
       <p:sp>
         <p:nvSpPr>
-          <p:cNvPr id="239947835" name="Rectangle 22"/>
+          <p:cNvPr id="124943452" name="Rectangle 22"/>
           <p:cNvSpPr/>
           <p:nvPr/>
         </p:nvSpPr>
@@ -34515,7 +34515,7 @@
       </p:sp>
       <p:sp>
         <p:nvSpPr>
-          <p:cNvPr id="22299688" name="TextBox 23"/>
+          <p:cNvPr id="285843232" name="TextBox 23"/>
           <p:cNvSpPr txBox="1"/>
           <p:nvPr/>
         </p:nvSpPr>
@@ -34553,7 +34553,7 @@
       </p:sp>
       <p:sp>
         <p:nvSpPr>
-          <p:cNvPr id="1115216744" name="TextBox 24"/>
+          <p:cNvPr id="417965903" name="TextBox 24"/>
           <p:cNvSpPr txBox="1"/>
           <p:nvPr/>
         </p:nvSpPr>
@@ -34587,7 +34587,7 @@
       </p:sp>
       <p:sp>
         <p:nvSpPr>
-          <p:cNvPr id="1258338624" name="Arrow: Right 29"/>
+          <p:cNvPr id="617169079" name="Arrow: Right 29"/>
           <p:cNvSpPr/>
           <p:nvPr/>
         </p:nvSpPr>
@@ -34632,7 +34632,7 @@
       </p:sp>
       <p:sp>
         <p:nvSpPr>
-          <p:cNvPr id="281183359" name="Arrow: Right 30"/>
+          <p:cNvPr id="1570932888" name="Arrow: Right 30"/>
           <p:cNvSpPr/>
           <p:nvPr/>
         </p:nvSpPr>
@@ -34710,7 +34710,7 @@
       </p:grpSpPr>
       <p:sp>
         <p:nvSpPr>
-          <p:cNvPr id="1490414910" name="Title 1"/>
+          <p:cNvPr id="1713861174" name="Title 1"/>
           <p:cNvSpPr>
             <a:spLocks noGrp="1"/>
           </p:cNvSpPr>
@@ -34771,7 +34771,7 @@
       </p:grpSpPr>
       <p:sp>
         <p:nvSpPr>
-          <p:cNvPr id="1765255223" name="Title 1"/>
+          <p:cNvPr id="1647696110" name="Title 1"/>
           <p:cNvSpPr>
             <a:spLocks noGrp="1"/>
           </p:cNvSpPr>
@@ -34830,7 +34830,7 @@
       </p:grpSpPr>
       <p:sp>
         <p:nvSpPr>
-          <p:cNvPr id="202588284" name="Content Placeholder 2"/>
+          <p:cNvPr id="1815260204" name="Content Placeholder 2"/>
           <p:cNvSpPr>
             <a:spLocks noGrp="1"/>
           </p:cNvSpPr>
@@ -34893,7 +34893,7 @@
       </p:sp>
       <p:cxnSp>
         <p:nvCxnSpPr>
-          <p:cNvPr id="2101069377" name="Straight Arrow Connector 5"/>
+          <p:cNvPr id="1779193435" name="Straight Arrow Connector 5"/>
           <p:cNvCxnSpPr/>
           <p:nvPr/>
         </p:nvCxnSpPr>
@@ -34931,7 +34931,7 @@
       </p:cxnSp>
       <p:sp>
         <p:nvSpPr>
-          <p:cNvPr id="1300510898" name="Rectangle 6"/>
+          <p:cNvPr id="996927384" name="Rectangle 6"/>
           <p:cNvSpPr/>
           <p:nvPr/>
         </p:nvSpPr>
@@ -34983,7 +34983,7 @@
       </p:sp>
       <p:sp>
         <p:nvSpPr>
-          <p:cNvPr id="106802015" name="Rectangle 7"/>
+          <p:cNvPr id="114108977" name="Rectangle 7"/>
           <p:cNvSpPr/>
           <p:nvPr/>
         </p:nvSpPr>
@@ -35032,7 +35032,7 @@
       </p:sp>
       <p:sp>
         <p:nvSpPr>
-          <p:cNvPr id="1664628026" name="Rectangle 8"/>
+          <p:cNvPr id="32720228" name="Rectangle 8"/>
           <p:cNvSpPr/>
           <p:nvPr/>
         </p:nvSpPr>
@@ -35083,7 +35083,7 @@
       </p:sp>
       <p:sp>
         <p:nvSpPr>
-          <p:cNvPr id="1701991253" name="Rectangle 9"/>
+          <p:cNvPr id="914207213" name="Rectangle 9"/>
           <p:cNvSpPr/>
           <p:nvPr/>
         </p:nvSpPr>
@@ -35132,7 +35132,7 @@
       </p:sp>
       <p:sp>
         <p:nvSpPr>
-          <p:cNvPr id="53363338" name="Rectangle 10"/>
+          <p:cNvPr id="2010674461" name="Rectangle 10"/>
           <p:cNvSpPr/>
           <p:nvPr/>
         </p:nvSpPr>
@@ -35183,7 +35183,7 @@
       </p:sp>
       <p:sp>
         <p:nvSpPr>
-          <p:cNvPr id="1941349853" name="Rectangle 11"/>
+          <p:cNvPr id="2116519882" name="Rectangle 11"/>
           <p:cNvSpPr/>
           <p:nvPr/>
         </p:nvSpPr>
@@ -35232,7 +35232,7 @@
       </p:sp>
       <p:sp>
         <p:nvSpPr>
-          <p:cNvPr id="1930178379" name="Rectangle 12"/>
+          <p:cNvPr id="485026554" name="Rectangle 12"/>
           <p:cNvSpPr/>
           <p:nvPr/>
         </p:nvSpPr>
@@ -35281,7 +35281,7 @@
       </p:sp>
       <p:sp>
         <p:nvSpPr>
-          <p:cNvPr id="162129406" name="Rectangle 13"/>
+          <p:cNvPr id="995605288" name="Rectangle 13"/>
           <p:cNvSpPr/>
           <p:nvPr/>
         </p:nvSpPr>
@@ -35330,7 +35330,7 @@
       </p:sp>
       <p:sp>
         <p:nvSpPr>
-          <p:cNvPr id="1770577265" name="Rectangle 14"/>
+          <p:cNvPr id="1649740064" name="Rectangle 14"/>
           <p:cNvSpPr/>
           <p:nvPr/>
         </p:nvSpPr>
@@ -35379,7 +35379,7 @@
       </p:sp>
       <p:sp>
         <p:nvSpPr>
-          <p:cNvPr id="1469857508" name="TextBox 17"/>
+          <p:cNvPr id="1719540844" name="TextBox 17"/>
           <p:cNvSpPr txBox="1"/>
           <p:nvPr/>
         </p:nvSpPr>
@@ -35413,7 +35413,7 @@
       </p:sp>
       <p:sp>
         <p:nvSpPr>
-          <p:cNvPr id="688522076" name="TextBox 19"/>
+          <p:cNvPr id="993414887" name="TextBox 19"/>
           <p:cNvSpPr txBox="1"/>
           <p:nvPr/>
         </p:nvSpPr>
@@ -35447,7 +35447,7 @@
       </p:sp>
       <p:sp>
         <p:nvSpPr>
-          <p:cNvPr id="1251587662" name="TextBox 20"/>
+          <p:cNvPr id="1198991469" name="TextBox 20"/>
           <p:cNvSpPr txBox="1"/>
           <p:nvPr/>
         </p:nvSpPr>
@@ -35481,7 +35481,7 @@
       </p:sp>
       <p:sp>
         <p:nvSpPr>
-          <p:cNvPr id="428049660" name="TextBox 22"/>
+          <p:cNvPr id="1333315218" name="TextBox 22"/>
           <p:cNvSpPr txBox="1"/>
           <p:nvPr/>
         </p:nvSpPr>
@@ -35515,7 +35515,7 @@
       </p:sp>
       <p:sp>
         <p:nvSpPr>
-          <p:cNvPr id="798830289" name="TextBox 23"/>
+          <p:cNvPr id="2117440478" name="TextBox 23"/>
           <p:cNvSpPr txBox="1"/>
           <p:nvPr/>
         </p:nvSpPr>
@@ -35549,7 +35549,7 @@
       </p:sp>
       <p:sp>
         <p:nvSpPr>
-          <p:cNvPr id="1890527591" name="TextBox 24"/>
+          <p:cNvPr id="468291827" name="TextBox 24"/>
           <p:cNvSpPr txBox="1"/>
           <p:nvPr/>
         </p:nvSpPr>
@@ -35583,7 +35583,7 @@
       </p:sp>
       <p:sp>
         <p:nvSpPr>
-          <p:cNvPr id="1854488229" name="TextBox 25"/>
+          <p:cNvPr id="1513028884" name="TextBox 25"/>
           <p:cNvSpPr txBox="1"/>
           <p:nvPr/>
         </p:nvSpPr>
@@ -35617,7 +35617,7 @@
       </p:sp>
       <p:sp>
         <p:nvSpPr>
-          <p:cNvPr id="152909674" name="TextBox 26"/>
+          <p:cNvPr id="1378111513" name="TextBox 26"/>
           <p:cNvSpPr txBox="1"/>
           <p:nvPr/>
         </p:nvSpPr>
@@ -35651,7 +35651,7 @@
       </p:sp>
       <p:sp>
         <p:nvSpPr>
-          <p:cNvPr id="1702766710" name="TextBox 27"/>
+          <p:cNvPr id="930660439" name="TextBox 27"/>
           <p:cNvSpPr txBox="1"/>
           <p:nvPr/>
         </p:nvSpPr>
@@ -35685,14 +35685,14 @@
       </p:sp>
       <p:sp>
         <p:nvSpPr>
-          <p:cNvPr id="1974288706" name="TextBox 28"/>
+          <p:cNvPr id="165415558" name="TextBox 28"/>
           <p:cNvSpPr txBox="1"/>
           <p:nvPr/>
         </p:nvSpPr>
         <p:spPr bwMode="auto">
           <a:xfrm>
-            <a:off x="7304048" y="566853"/>
-            <a:ext cx="4248614" cy="369332"/>
+            <a:off x="7304047" y="566852"/>
+            <a:ext cx="4255813" cy="366119"/>
           </a:xfrm>
           <a:prstGeom prst="rect">
             <a:avLst/>
@@ -35727,7 +35727,7 @@
                   </a:schemeClr>
                 </a:solidFill>
               </a:rPr>
-              <a:t>Mnist</a:t>
+              <a:t>RGB</a:t>
             </a:r>
             <a:r>
               <a:rPr lang="en-US">
@@ -35768,7 +35768,7 @@
       </p:sp>
       <p:sp>
         <p:nvSpPr>
-          <p:cNvPr id="1431690532" name="TextBox 29"/>
+          <p:cNvPr id="832957362" name="TextBox 29"/>
           <p:cNvSpPr txBox="1"/>
           <p:nvPr/>
         </p:nvSpPr>
@@ -35884,7 +35884,7 @@
       </p:sp>
       <p:sp>
         <p:nvSpPr>
-          <p:cNvPr id="584069172" name="TextBox 30"/>
+          <p:cNvPr id="369013722" name="TextBox 30"/>
           <p:cNvSpPr txBox="1"/>
           <p:nvPr/>
         </p:nvSpPr>
@@ -35955,7 +35955,7 @@
       </p:sp>
       <p:sp>
         <p:nvSpPr>
-          <p:cNvPr id="1062342336" name="TextBox 31"/>
+          <p:cNvPr id="1154638280" name="TextBox 31"/>
           <p:cNvSpPr txBox="1"/>
           <p:nvPr/>
         </p:nvSpPr>
@@ -36077,7 +36077,7 @@
       </p:sp>
       <p:sp>
         <p:nvSpPr>
-          <p:cNvPr id="1490158147" name="TextBox 32"/>
+          <p:cNvPr id="1688118313" name="TextBox 32"/>
           <p:cNvSpPr txBox="1"/>
           <p:nvPr/>
         </p:nvSpPr>
@@ -36117,7 +36117,7 @@
       </p:sp>
       <p:sp>
         <p:nvSpPr>
-          <p:cNvPr id="834286551" name="TextBox 33"/>
+          <p:cNvPr id="143804108" name="TextBox 33"/>
           <p:cNvSpPr txBox="1"/>
           <p:nvPr/>
         </p:nvSpPr>
@@ -36157,7 +36157,7 @@
       </p:sp>
       <p:sp>
         <p:nvSpPr>
-          <p:cNvPr id="1373636219" name="TextBox 34"/>
+          <p:cNvPr id="1748808553" name="TextBox 34"/>
           <p:cNvSpPr txBox="1"/>
           <p:nvPr/>
         </p:nvSpPr>
@@ -36241,7 +36241,7 @@
       </p:sp>
       <p:sp>
         <p:nvSpPr>
-          <p:cNvPr id="1084992631" name="TextBox 35"/>
+          <p:cNvPr id="1370384840" name="TextBox 35"/>
           <p:cNvSpPr txBox="1"/>
           <p:nvPr/>
         </p:nvSpPr>
@@ -36313,7 +36313,7 @@
       </p:sp>
       <p:sp>
         <p:nvSpPr>
-          <p:cNvPr id="265656790" name="TextBox 36"/>
+          <p:cNvPr id="454540881" name="TextBox 36"/>
           <p:cNvSpPr txBox="1"/>
           <p:nvPr/>
         </p:nvSpPr>
@@ -36386,7 +36386,7 @@
       </p:grpSpPr>
       <p:sp>
         <p:nvSpPr>
-          <p:cNvPr id="250068845" name="Title 1"/>
+          <p:cNvPr id="1118185286" name="Title 1"/>
           <p:cNvSpPr>
             <a:spLocks noGrp="1"/>
           </p:cNvSpPr>
@@ -36414,7 +36414,7 @@
       </p:sp>
       <p:sp>
         <p:nvSpPr>
-          <p:cNvPr id="501917419" name="Text Placeholder 2"/>
+          <p:cNvPr id="1825873109" name="Text Placeholder 2"/>
           <p:cNvSpPr>
             <a:spLocks noGrp="1"/>
           </p:cNvSpPr>
@@ -36678,7 +36678,7 @@
       </p:sp>
       <p:sp>
         <p:nvSpPr>
-          <p:cNvPr id="1776109971" name="Text Placeholder 4"/>
+          <p:cNvPr id="829169222" name="Text Placeholder 4"/>
           <p:cNvSpPr>
             <a:spLocks noGrp="1"/>
           </p:cNvSpPr>
@@ -36946,7 +36946,7 @@
       </p:sp>
       <p:sp>
         <p:nvSpPr>
-          <p:cNvPr id="1824183545" name="Content Placeholder 5"/>
+          <p:cNvPr id="112520087" name="Content Placeholder 5"/>
           <p:cNvSpPr>
             <a:spLocks noGrp="1"/>
           </p:cNvSpPr>
@@ -37229,7 +37229,7 @@
       </p:sp>
       <p:sp>
         <p:nvSpPr>
-          <p:cNvPr id="627520716" name="Content Placeholder 5"/>
+          <p:cNvPr id="461071926" name="Content Placeholder 5"/>
           <p:cNvSpPr txBox="1"/>
           <p:nvPr/>
         </p:nvSpPr>
@@ -37507,14 +37507,14 @@
       </p:sp>
       <p:sp>
         <p:nvSpPr>
-          <p:cNvPr id="978642737" name="TextBox 8"/>
+          <p:cNvPr id="900452275" name="TextBox 8"/>
           <p:cNvSpPr txBox="1"/>
           <p:nvPr/>
         </p:nvSpPr>
         <p:spPr bwMode="auto">
           <a:xfrm>
-            <a:off x="522671" y="2898828"/>
-            <a:ext cx="5462534" cy="3566519"/>
+            <a:off x="522670" y="2898828"/>
+            <a:ext cx="5465413" cy="3566519"/>
           </a:xfrm>
           <a:prstGeom prst="rect">
             <a:avLst/>
@@ -37542,7 +37542,7 @@
                 <a:ea typeface="Calibri"/>
                 <a:cs typeface="Calibri"/>
               </a:rPr>
-              <a:t>Upadni</a:t>
+              <a:t>Ulazni</a:t>
             </a:r>
             <a:r>
               <a:rPr lang="en-US" b="1">
@@ -38666,14 +38666,14 @@
       </p:sp>
       <p:sp>
         <p:nvSpPr>
-          <p:cNvPr id="158408977" name="TextBox 9"/>
+          <p:cNvPr id="1090098660" name="TextBox 9"/>
           <p:cNvSpPr txBox="1"/>
           <p:nvPr/>
         </p:nvSpPr>
         <p:spPr bwMode="auto">
           <a:xfrm>
-            <a:off x="6204249" y="2898826"/>
-            <a:ext cx="5461815" cy="3693319"/>
+            <a:off x="6204249" y="2898824"/>
+            <a:ext cx="5465054" cy="3657960"/>
           </a:xfrm>
           <a:prstGeom prst="rect">
             <a:avLst/>
@@ -39540,18 +39540,7 @@
                 <a:ea typeface="Calibri"/>
                 <a:cs typeface="Calibri"/>
               </a:rPr>
-              <a:t>skraćene</a:t>
-            </a:r>
-            <a:r>
-              <a:rPr lang="en-US">
-                <a:solidFill>
-                  <a:srgbClr val="4A6572"/>
-                </a:solidFill>
-                <a:latin typeface="Calibri"/>
-                <a:ea typeface="Calibri"/>
-                <a:cs typeface="Calibri"/>
-              </a:rPr>
-              <a:t> </a:t>
+              <a:t>porezane </a:t>
             </a:r>
             <a:r>
               <a:rPr lang="en-US">
@@ -39629,7 +39618,7 @@
       </p:grpSpPr>
       <p:sp>
         <p:nvSpPr>
-          <p:cNvPr id="289713914" name="Title 1"/>
+          <p:cNvPr id="1766869726" name="Title 1"/>
           <p:cNvSpPr>
             <a:spLocks noGrp="1"/>
           </p:cNvSpPr>
@@ -39679,7 +39668,7 @@
       </p:sp>
       <p:pic>
         <p:nvPicPr>
-          <p:cNvPr id="457217398" name="Content Placeholder 6" descr="A screenshot of a computer&#10;&#10;AI-generated content may be incorrect."/>
+          <p:cNvPr id="1676976777" name="Content Placeholder 6" descr="A screenshot of a computer&#10;&#10;AI-generated content may be incorrect."/>
           <p:cNvPicPr>
             <a:picLocks noChangeAspect="1" noGrp="1"/>
           </p:cNvPicPr>
@@ -39704,7 +39693,7 @@
       </p:pic>
       <p:sp>
         <p:nvSpPr>
-          <p:cNvPr id="1461158601" name="Rectangle 8"/>
+          <p:cNvPr id="1123298754" name="Rectangle 8"/>
           <p:cNvSpPr/>
           <p:nvPr/>
         </p:nvSpPr>
@@ -39779,7 +39768,7 @@
       </p:sp>
       <p:sp>
         <p:nvSpPr>
-          <p:cNvPr id="362238938" name="Rectangle 12"/>
+          <p:cNvPr id="233288348" name="Rectangle 12"/>
           <p:cNvSpPr/>
           <p:nvPr/>
         </p:nvSpPr>
@@ -39862,7 +39851,7 @@
       </p:sp>
       <p:sp>
         <p:nvSpPr>
-          <p:cNvPr id="388654166" name="Rectangle 2"/>
+          <p:cNvPr id="1349790179" name="Rectangle 2"/>
           <p:cNvSpPr/>
           <p:nvPr/>
         </p:nvSpPr>
@@ -39971,7 +39960,7 @@
       </p:grpSpPr>
       <p:sp>
         <p:nvSpPr>
-          <p:cNvPr id="1600336204" name="Rectangle 1"/>
+          <p:cNvPr id="823105566" name="Rectangle 1"/>
           <p:cNvSpPr/>
           <p:nvPr/>
         </p:nvSpPr>
@@ -40040,7 +40029,7 @@
       </p:sp>
       <p:sp>
         <p:nvSpPr>
-          <p:cNvPr id="203450175" name="TextBox 2"/>
+          <p:cNvPr id="989684009" name="TextBox 2"/>
           <p:cNvSpPr txBox="1"/>
           <p:nvPr/>
         </p:nvSpPr>
@@ -40101,7 +40090,7 @@
       </p:sp>
       <p:sp>
         <p:nvSpPr>
-          <p:cNvPr id="2096182650" name="Rectangle 3"/>
+          <p:cNvPr id="481789116" name="Rectangle 3"/>
           <p:cNvSpPr/>
           <p:nvPr/>
         </p:nvSpPr>
@@ -40230,7 +40219,7 @@
       </p:sp>
       <p:cxnSp>
         <p:nvCxnSpPr>
-          <p:cNvPr id="382130346" name="Connector 4"/>
+          <p:cNvPr id="1428238706" name="Connector 4"/>
           <p:cNvCxnSpPr/>
           <p:nvPr/>
         </p:nvCxnSpPr>
@@ -40265,7 +40254,7 @@
       </p:cxnSp>
       <p:sp>
         <p:nvSpPr>
-          <p:cNvPr id="854507612" name="Rectangle 5"/>
+          <p:cNvPr id="192828751" name="Rectangle 5"/>
           <p:cNvSpPr/>
           <p:nvPr/>
         </p:nvSpPr>
@@ -40394,7 +40383,7 @@
       </p:sp>
       <p:cxnSp>
         <p:nvCxnSpPr>
-          <p:cNvPr id="362218478" name="Connector 6"/>
+          <p:cNvPr id="102651173" name="Connector 6"/>
           <p:cNvCxnSpPr/>
           <p:nvPr/>
         </p:nvCxnSpPr>
@@ -40429,7 +40418,7 @@
       </p:cxnSp>
       <p:sp>
         <p:nvSpPr>
-          <p:cNvPr id="917075372" name="Rectangle 7"/>
+          <p:cNvPr id="2114381484" name="Rectangle 7"/>
           <p:cNvSpPr/>
           <p:nvPr/>
         </p:nvSpPr>
@@ -40558,7 +40547,7 @@
       </p:sp>
       <p:sp>
         <p:nvSpPr>
-          <p:cNvPr id="1167844535" name="Rounded Rectangle 8"/>
+          <p:cNvPr id="77524344" name="Rounded Rectangle 8"/>
           <p:cNvSpPr/>
           <p:nvPr/>
         </p:nvSpPr>
@@ -40885,7 +40874,7 @@
       </p:grpSpPr>
       <p:sp>
         <p:nvSpPr>
-          <p:cNvPr id="1597962476" name="Rectangle 1"/>
+          <p:cNvPr id="665808853" name="Rectangle 1"/>
           <p:cNvSpPr/>
           <p:nvPr/>
         </p:nvSpPr>
@@ -40954,7 +40943,7 @@
       </p:sp>
       <p:sp>
         <p:nvSpPr>
-          <p:cNvPr id="536256790" name="TextBox 2"/>
+          <p:cNvPr id="1072934721" name="TextBox 2"/>
           <p:cNvSpPr txBox="1"/>
           <p:nvPr/>
         </p:nvSpPr>
@@ -41015,7 +41004,7 @@
       </p:sp>
       <p:sp>
         <p:nvSpPr>
-          <p:cNvPr id="1005477973" name="Rectangle 3"/>
+          <p:cNvPr id="595287561" name="Rectangle 3"/>
           <p:cNvSpPr/>
           <p:nvPr/>
         </p:nvSpPr>
@@ -41090,7 +41079,7 @@
       </p:sp>
       <p:sp>
         <p:nvSpPr>
-          <p:cNvPr id="961704266" name="Rectangle 4"/>
+          <p:cNvPr id="1895110910" name="Rectangle 4"/>
           <p:cNvSpPr/>
           <p:nvPr/>
         </p:nvSpPr>
@@ -41165,7 +41154,7 @@
       </p:sp>
       <p:sp>
         <p:nvSpPr>
-          <p:cNvPr id="1098196090" name="Rounded Rectangle 5"/>
+          <p:cNvPr id="2083995012" name="Rounded Rectangle 5"/>
           <p:cNvSpPr/>
           <p:nvPr/>
         </p:nvSpPr>
@@ -41361,7 +41350,7 @@
       </p:sp>
       <p:sp>
         <p:nvSpPr>
-          <p:cNvPr id="1335830666" name="Rounded Rectangle 6"/>
+          <p:cNvPr id="899900137" name="Rounded Rectangle 6"/>
           <p:cNvSpPr/>
           <p:nvPr/>
         </p:nvSpPr>
@@ -41557,7 +41546,7 @@
       </p:sp>
       <p:sp>
         <p:nvSpPr>
-          <p:cNvPr id="227658838" name="Rounded Rectangle 7"/>
+          <p:cNvPr id="595973208" name="Rounded Rectangle 7"/>
           <p:cNvSpPr/>
           <p:nvPr/>
         </p:nvSpPr>
@@ -41672,7 +41661,7 @@
       </p:grpSpPr>
       <p:sp>
         <p:nvSpPr>
-          <p:cNvPr id="1444903360" name="Rectangle 1"/>
+          <p:cNvPr id="156822250" name="Rectangle 1"/>
           <p:cNvSpPr/>
           <p:nvPr/>
         </p:nvSpPr>
@@ -41741,7 +41730,7 @@
       </p:sp>
       <p:sp>
         <p:nvSpPr>
-          <p:cNvPr id="981253944" name="TextBox 2"/>
+          <p:cNvPr id="1470734760" name="TextBox 2"/>
           <p:cNvSpPr txBox="1"/>
           <p:nvPr/>
         </p:nvSpPr>
@@ -41802,7 +41791,7 @@
       </p:sp>
       <p:sp>
         <p:nvSpPr>
-          <p:cNvPr id="89768091" name="Rectangle 3"/>
+          <p:cNvPr id="1388085670" name="Rectangle 3"/>
           <p:cNvSpPr/>
           <p:nvPr/>
         </p:nvSpPr>
@@ -41931,7 +41920,7 @@
       </p:sp>
       <p:cxnSp>
         <p:nvCxnSpPr>
-          <p:cNvPr id="1632791898" name="Connector 4"/>
+          <p:cNvPr id="1991818410" name="Connector 4"/>
           <p:cNvCxnSpPr/>
           <p:nvPr/>
         </p:nvCxnSpPr>
@@ -41966,7 +41955,7 @@
       </p:cxnSp>
       <p:sp>
         <p:nvSpPr>
-          <p:cNvPr id="1681650201" name="Rectangle 5"/>
+          <p:cNvPr id="1029740022" name="Rectangle 5"/>
           <p:cNvSpPr/>
           <p:nvPr/>
         </p:nvSpPr>
@@ -42095,7 +42084,7 @@
       </p:sp>
       <p:cxnSp>
         <p:nvCxnSpPr>
-          <p:cNvPr id="220358925" name="Connector 6"/>
+          <p:cNvPr id="1054077360" name="Connector 6"/>
           <p:cNvCxnSpPr/>
           <p:nvPr/>
         </p:nvCxnSpPr>
@@ -42130,7 +42119,7 @@
       </p:cxnSp>
       <p:sp>
         <p:nvSpPr>
-          <p:cNvPr id="1625554381" name="Rectangle 7"/>
+          <p:cNvPr id="2023483934" name="Rectangle 7"/>
           <p:cNvSpPr/>
           <p:nvPr/>
         </p:nvSpPr>
@@ -42259,7 +42248,7 @@
       </p:sp>
       <p:cxnSp>
         <p:nvCxnSpPr>
-          <p:cNvPr id="953404833" name="Connector 8"/>
+          <p:cNvPr id="120381606" name="Connector 8"/>
           <p:cNvCxnSpPr/>
           <p:nvPr/>
         </p:nvCxnSpPr>
@@ -42294,7 +42283,7 @@
       </p:cxnSp>
       <p:sp>
         <p:nvSpPr>
-          <p:cNvPr id="1076495720" name="Rectangle 9"/>
+          <p:cNvPr id="731446462" name="Rectangle 9"/>
           <p:cNvSpPr/>
           <p:nvPr/>
         </p:nvSpPr>
@@ -42423,7 +42412,7 @@
       </p:sp>
       <p:cxnSp>
         <p:nvCxnSpPr>
-          <p:cNvPr id="1328618560" name="Connector 10"/>
+          <p:cNvPr id="1185573289" name="Connector 10"/>
           <p:cNvCxnSpPr/>
           <p:nvPr/>
         </p:nvCxnSpPr>
@@ -42458,7 +42447,7 @@
       </p:cxnSp>
       <p:sp>
         <p:nvSpPr>
-          <p:cNvPr id="780209360" name="Rectangle 11"/>
+          <p:cNvPr id="405248102" name="Rectangle 11"/>
           <p:cNvSpPr/>
           <p:nvPr/>
         </p:nvSpPr>
@@ -42587,7 +42576,7 @@
       </p:sp>
       <p:cxnSp>
         <p:nvCxnSpPr>
-          <p:cNvPr id="705469916" name="Connector 12"/>
+          <p:cNvPr id="1843790897" name="Connector 12"/>
           <p:cNvCxnSpPr/>
           <p:nvPr/>
         </p:nvCxnSpPr>
@@ -42622,7 +42611,7 @@
       </p:cxnSp>
       <p:sp>
         <p:nvSpPr>
-          <p:cNvPr id="1035829278" name="Rectangle 13"/>
+          <p:cNvPr id="273508270" name="Rectangle 13"/>
           <p:cNvSpPr/>
           <p:nvPr/>
         </p:nvSpPr>
@@ -42751,7 +42740,7 @@
       </p:sp>
       <p:sp>
         <p:nvSpPr>
-          <p:cNvPr id="358540890" name="Rounded Rectangle 14"/>
+          <p:cNvPr id="1189055819" name="Rounded Rectangle 14"/>
           <p:cNvSpPr/>
           <p:nvPr/>
         </p:nvSpPr>
@@ -42942,7 +42931,7 @@
       </p:grpSpPr>
       <p:sp>
         <p:nvSpPr>
-          <p:cNvPr id="1491719911" name="Rectangle 1"/>
+          <p:cNvPr id="820853127" name="Rectangle 1"/>
           <p:cNvSpPr/>
           <p:nvPr/>
         </p:nvSpPr>
@@ -43011,7 +43000,7 @@
       </p:sp>
       <p:sp>
         <p:nvSpPr>
-          <p:cNvPr id="907538610" name="TextBox 2"/>
+          <p:cNvPr id="497341968" name="TextBox 2"/>
           <p:cNvSpPr txBox="1"/>
           <p:nvPr/>
         </p:nvSpPr>
@@ -43072,7 +43061,7 @@
       </p:sp>
       <p:sp>
         <p:nvSpPr>
-          <p:cNvPr id="2054010751" name="Rounded Rectangle 3"/>
+          <p:cNvPr id="1710689038" name="Rounded Rectangle 3"/>
           <p:cNvSpPr/>
           <p:nvPr/>
         </p:nvSpPr>
@@ -43265,7 +43254,7 @@
       </p:sp>
       <p:sp>
         <p:nvSpPr>
-          <p:cNvPr id="1398925388" name="Rounded Rectangle 4"/>
+          <p:cNvPr id="162478695" name="Rounded Rectangle 4"/>
           <p:cNvSpPr/>
           <p:nvPr/>
         </p:nvSpPr>
@@ -43458,7 +43447,7 @@
       </p:sp>
       <p:sp>
         <p:nvSpPr>
-          <p:cNvPr id="1223102049" name="Rounded Rectangle 5"/>
+          <p:cNvPr id="669674148" name="Rounded Rectangle 5"/>
           <p:cNvSpPr/>
           <p:nvPr/>
         </p:nvSpPr>
